--- a/protected-downloads/praesentation/TL10.pptx
+++ b/protected-downloads/praesentation/TL10.pptx
@@ -4853,7 +4853,7 @@
                 </a:solidFill>
                 <a:latin typeface="Arial"/>
               </a:rPr>
-              <a:t>v0.2</a:t>
+              <a:t>v1.0</a:t>
             </a:r>
           </a:p>
         </p:txBody>

--- a/protected-downloads/praesentation/TL10.pptx
+++ b/protected-downloads/praesentation/TL10.pptx
@@ -11122,7 +11122,7 @@
                 </a:solidFill>
                 <a:latin typeface="Consolas"/>
               </a:rPr>
-              <a:t>12:35       </a:t>
+              <a:t>12:40       </a:t>
             </a:r>
             <a:r>
               <a:rPr sz="1200" b="1">
@@ -11150,7 +11150,7 @@
                 </a:solidFill>
                 <a:latin typeface="Consolas"/>
               </a:rPr>
-              <a:t>12:40       </a:t>
+              <a:t>12:45       </a:t>
             </a:r>
             <a:r>
               <a:rPr sz="1200" b="1">

--- a/protected-downloads/praesentation/TL10.pptx
+++ b/protected-downloads/praesentation/TL10.pptx
@@ -593,32 +593,22 @@
           <a:lstStyle/>
           <a:p>
             <a:r>
-              <a:t>Zeitregie ankündigen: Teil A–C in ca. 10 Min. abschließen, danach ausschließlich Teil D – mindestens 20 Min. Echter Bericht, keine Stichworte.</a:t>
-            </a:r>
-          </a:p>
-          <a:p>
-            <a:r>
-              <a:t>Situation muss real sein – muss aber nicht die sensibelste sein. Ideal: eine Situation, bei der TN in den nächsten zwei Wochen wirklich nach oben berichten müssen.</a:t>
-            </a:r>
-          </a:p>
-          <a:p>
-            <a:r>
-              <a:t>Mindesttiefe bei Teil D prüfen: Kein vollständig ausformulierter Bericht → kein substanzieller Fallberatungsgegenstand. Nach 15 Min. im Raum prüfen: steht da ein echter Bericht oder nur Stichworte?</a:t>
-            </a:r>
-          </a:p>
-          <a:p>
-            <a:r>
-              <a:t>Kollegiale Fallberatung (11:45–12:20): Dreiergruppen. Takt: 3 Min. Fallvorstellung, 6–7 Min. Rückmeldung, 1 Min. Reaktion. Feedback-Fokus: Technisch oder adaptiv richtig diagnostiziert? Sensemaking-Botschaft glaubwürdig? Report vollständig und risikoehrlich?</a:t>
-            </a:r>
-          </a:p>
-          <a:p>
-            <a:r>
-              <a:t>Trainer interveniert nur wenn Gruppe in Ratschläge statt Fragen verfällt: 'Nicht raten – fragen. Was versteht ihr noch nicht an diesem Fall?'</a:t>
-            </a:r>
-          </a:p>
-          <a:p>
-            <a:r>
-              <a:t>Falls TN keine eigene Situation einbringen will: Sandra/agree-Migration als Projektionsfläche – Erkenntnisse mental übertragen.</a:t>
+              <a:t>Transferaufgaben kurz einführen, nicht erklären – sie liegen im Workbook.</a:t>
+            </a:r>
+          </a:p>
+          <a:p>
+            <a:r>
+              <a:t>Jeden TN einen konkreten ersten Schritt mit Datum benennen lassen – auf Moderationskarte, TN nehmen sie mit.</a:t>
+            </a:r>
+          </a:p>
+          <a:p>
+            <a:r>
+              <a:t>Folgetermin sofort im Kalender: Die drei Transferaufgaben produzieren genau die Level-3-Evidenz des Moduls. Sie sind kein optionaler Zusatz.</a:t>
+            </a:r>
+          </a:p>
+          <a:p>
+            <a:r>
+              <a:t>Selbstcheck (Sec 5): in Stille ausfüllen, ca. 3 Min., bevor der Abschlussimpuls kommt.</a:t>
             </a:r>
           </a:p>
         </p:txBody>
@@ -688,91 +678,6 @@
           <a:lstStyle/>
           <a:p>
             <a:r>
-              <a:t>Transferaufgaben kurz einführen, nicht erklären – sie liegen im Workbook.</a:t>
-            </a:r>
-          </a:p>
-          <a:p>
-            <a:r>
-              <a:t>Jeden TN einen konkreten ersten Schritt mit Datum benennen lassen – auf Moderationskarte, TN nehmen sie mit.</a:t>
-            </a:r>
-          </a:p>
-          <a:p>
-            <a:r>
-              <a:t>Folgetermin sofort im Kalender: Die drei Transferaufgaben produzieren genau die Level-3-Evidenz des Moduls. Sie sind kein optionaler Zusatz.</a:t>
-            </a:r>
-          </a:p>
-          <a:p>
-            <a:r>
-              <a:t>Selbstcheck (Sec 5): in Stille ausfüllen, ca. 3 Min., bevor der Abschlussimpuls kommt.</a:t>
-            </a:r>
-          </a:p>
-        </p:txBody>
-      </p:sp>
-      <p:sp>
-        <p:nvSpPr>
-          <p:cNvPr id="4" name="Slide Number Placeholder 3"/>
-          <p:cNvSpPr>
-            <a:spLocks noGrp="1"/>
-          </p:cNvSpPr>
-          <p:nvPr>
-            <p:ph type="sldNum" idx="5" sz="quarter"/>
-          </p:nvPr>
-        </p:nvSpPr>
-        <p:spPr/>
-      </p:sp>
-    </p:spTree>
-  </p:cSld>
-  <p:clrMapOvr>
-    <a:masterClrMapping/>
-  </p:clrMapOvr>
-</p:notes>
-</file>
-
-<file path=ppt/notesSlides/notesSlide12.xml><?xml version="1.0" encoding="utf-8"?>
-<p:notes xmlns:a="http://schemas.openxmlformats.org/drawingml/2006/main" xmlns:p="http://schemas.openxmlformats.org/presentationml/2006/main" xmlns:r="http://schemas.openxmlformats.org/officeDocument/2006/relationships">
-  <p:cSld>
-    <p:spTree>
-      <p:nvGrpSpPr>
-        <p:cNvPr id="1" name=""/>
-        <p:cNvGrpSpPr/>
-        <p:nvPr/>
-      </p:nvGrpSpPr>
-      <p:grpSpPr>
-        <a:xfrm>
-          <a:off x="0" y="0"/>
-          <a:ext cx="0" cy="0"/>
-          <a:chOff x="0" y="0"/>
-          <a:chExt cx="0" cy="0"/>
-        </a:xfrm>
-      </p:grpSpPr>
-      <p:sp>
-        <p:nvSpPr>
-          <p:cNvPr id="2" name="Slide Image Placeholder 1"/>
-          <p:cNvSpPr>
-            <a:spLocks noGrp="1"/>
-          </p:cNvSpPr>
-          <p:nvPr>
-            <p:ph type="sldImg" idx="2"/>
-          </p:nvPr>
-        </p:nvSpPr>
-        <p:spPr/>
-      </p:sp>
-      <p:sp>
-        <p:nvSpPr>
-          <p:cNvPr id="3" name="Notes Placeholder 2"/>
-          <p:cNvSpPr>
-            <a:spLocks noGrp="1"/>
-          </p:cNvSpPr>
-          <p:nvPr>
-            <p:ph type="body" idx="3" sz="quarter"/>
-          </p:nvPr>
-        </p:nvSpPr>
-        <p:spPr/>
-        <p:txBody>
-          <a:bodyPr/>
-          <a:lstStyle/>
-          <a:p>
-            <a:r>
               <a:t>Abschlussrunde (1 Satz pro TN): Was nehme ich aus diesem Track mit – nicht nur aus TL10?</a:t>
             </a:r>
           </a:p>
@@ -858,7 +763,17 @@
           <a:lstStyle/>
           <a:p>
             <a:r>
-              <a:t>Siehe Trainerhandbuch (Sektion 3) für Moderationshinweise, Timing und erwartete Teilnehmerreaktionen.</a:t>
+              <a:t>Einstiegsrunde (09:00–09:10): Eine Unsicherheitssituation, die mich gerade beschäftigt – Stichwort-Nennungen an der Flipchart sammeln, noch nicht einordnen.</a:t>
+            </a:r>
+          </a:p>
+          <a:p>
+            <a:r>
+              <a:t>Überleitung: Diese Nennungen sind das Material des Tages. Wir werden sie zweimal anfassen – mit Heifetz und mit der Report-Struktur.</a:t>
+            </a:r>
+          </a:p>
+          <a:p>
+            <a:r>
+              <a:t>Brücke zu TL09 explizit ziehen: TL09 hat gelernt, Veränderungsprozesse zu gestalten – TL10 arbeitet mit Situationen, in denen das Veränderungsgeschehen selbst noch nicht klar ist.</a:t>
             </a:r>
           </a:p>
         </p:txBody>
@@ -928,17 +843,17 @@
           <a:lstStyle/>
           <a:p>
             <a:r>
-              <a:t>Einstiegsrunde (09:00–09:10): Eine Unsicherheitssituation, die mich gerade beschäftigt – Stichwort-Nennungen an der Flipchart sammeln, noch nicht einordnen.</a:t>
-            </a:r>
-          </a:p>
-          <a:p>
-            <a:r>
-              <a:t>Überleitung: Diese Nennungen sind das Material des Tages. Wir werden sie zweimal anfassen – mit Heifetz und mit der Report-Struktur.</a:t>
-            </a:r>
-          </a:p>
-          <a:p>
-            <a:r>
-              <a:t>Brücke zu TL09 explizit ziehen: TL09 hat gelernt, Veränderungsprozesse zu gestalten – TL10 arbeitet mit Situationen, in denen das Veränderungsgeschehen selbst noch nicht klar ist.</a:t>
+              <a:t>Sofortübung direkt nach der Tabelle (09:10–09:30): TN ordnen ihre Einstiegs-Nennungen ein – technisch oder adaptiv? Ergebnis an Flipchart; Trainer kommentiert Muster, nicht Einzelurteile.</a:t>
+            </a:r>
+          </a:p>
+          <a:p>
+            <a:r>
+              <a:t>Wiederkehrendes Muster ansprechen: Viele TN klassifizieren anfangs zu viel als adaptiv. Nach dem Input korrigieren viele. Das ist ein produktiver Moment: Wann ist etwas wirklich adaptiv – und nicht nur komplex technisch?</a:t>
+            </a:r>
+          </a:p>
+          <a:p>
+            <a:r>
+              <a:t>FK-Kontext verankern: agree-Migration ist überwiegend technisch – hat aber einen adaptiven Kern bei erfahrenen Beratern, die Beratungsidentität damit verbinden. Das Nebeneinander erkennen.</a:t>
             </a:r>
           </a:p>
         </p:txBody>
@@ -1008,17 +923,12 @@
           <a:lstStyle/>
           <a:p>
             <a:r>
-              <a:t>Sofortübung direkt nach der Tabelle (09:10–09:30): TN ordnen ihre Einstiegs-Nennungen ein – technisch oder adaptiv? Ergebnis an Flipchart; Trainer kommentiert Muster, nicht Einzelurteile.</a:t>
-            </a:r>
-          </a:p>
-          <a:p>
-            <a:r>
-              <a:t>Wiederkehrendes Muster ansprechen: Viele TN klassifizieren anfangs zu viel als adaptiv. Nach dem Input korrigieren viele. Das ist ein produktiver Moment: Wann ist etwas wirklich adaptiv – und nicht nur komplex technisch?</a:t>
-            </a:r>
-          </a:p>
-          <a:p>
-            <a:r>
-              <a:t>FK-Kontext verankern: agree-Migration ist überwiegend technisch – hat aber einen adaptiven Kern bei erfahrenen Beratern, die Beratungsidentität damit verbinden. Das Nebeneinander erkennen.</a:t>
+              <a:t>Konkrete Beispiele aus dem FK-Alltag: neue Zielsystematik nach Verbandsvorgabe (adaptiv), CRM-Umstellung (technisch), Neuausrichtung des Beratungsansatzes (adaptiv mit technischem Deckmantel).</a:t>
+            </a:r>
+          </a:p>
+          <a:p>
+            <a:r>
+              <a:t>Grenze benennen: Die Dichotomie ist idealtypisch – in der Praxis überlagern sich technische und adaptive Anteile. Das Modell hat dennoch hohen diagnostischen Wert: Es stellt eine Frage, die sonst implizit bleibt.</a:t>
             </a:r>
           </a:p>
         </p:txBody>
@@ -1088,12 +998,17 @@
           <a:lstStyle/>
           <a:p>
             <a:r>
-              <a:t>Konkrete Beispiele aus dem FK-Alltag: neue Zielsystematik nach Verbandsvorgabe (adaptiv), CRM-Umstellung (technisch), Neuausrichtung des Beratungsansatzes (adaptiv mit technischem Deckmantel).</a:t>
-            </a:r>
-          </a:p>
-          <a:p>
-            <a:r>
-              <a:t>Grenze benennen: Die Dichotomie ist idealtypisch – in der Praxis überlagern sich technische und adaptive Anteile. Das Modell hat dennoch hohen diagnostischen Wert: Es stellt eine Frage, die sonst implizit bleibt.</a:t>
+              <a:t>Gesprächsrunde (09:30–09:50): Wie sprichst du mit deinem Team über Situationen, in denen du selbst noch nicht klar bist? Trainer visualisiert Muster an Flipchart.</a:t>
+            </a:r>
+          </a:p>
+          <a:p>
+            <a:r>
+              <a:t>Pseudosicherheitsformeln im FK-Alltag benennen und kontrastieren: 'Das kriegen wir hin.' vs. 'Ich weiß noch nicht genau, wie das ausgeht – was ich weiß ist ... und was wir jetzt tun können ist...'</a:t>
+            </a:r>
+          </a:p>
+          <a:p>
+            <a:r>
+              <a:t>Edmondson verankern: Ambiguitätstoleranz der Führungskraft ist kein persönliches Merkmal, sondern ein Systemparameter – sie bestimmt, ob das Team in der nächsten Unsicherheitsphase lernfähig ist.</a:t>
             </a:r>
           </a:p>
         </p:txBody>
@@ -1163,17 +1078,12 @@
           <a:lstStyle/>
           <a:p>
             <a:r>
-              <a:t>Gesprächsrunde (09:30–09:50): Wie sprichst du mit deinem Team über Situationen, in denen du selbst noch nicht klar bist? Trainer visualisiert Muster an Flipchart.</a:t>
-            </a:r>
-          </a:p>
-          <a:p>
-            <a:r>
-              <a:t>Pseudosicherheitsformeln im FK-Alltag benennen und kontrastieren: 'Das kriegen wir hin.' vs. 'Ich weiß noch nicht genau, wie das ausgeht – was ich weiß ist ... und was wir jetzt tun können ist...'</a:t>
-            </a:r>
-          </a:p>
-          <a:p>
-            <a:r>
-              <a:t>Edmondson verankern: Ambiguitätstoleranz der Führungskraft ist kein persönliches Merkmal, sondern ein Systemparameter – sie bestimmt, ob das Team in der nächsten Unsicherheitsphase lernfähig ist.</a:t>
+              <a:t>Die drei Fragen sind die Merkkarte für das Team-Gespräch. TN kennen sie nach diesem Impuls – AB-1 Schritt 2 und AB-2 Teil C bauen direkt darauf auf.</a:t>
+            </a:r>
+          </a:p>
+          <a:p>
+            <a:r>
+              <a:t>Sandra-Überleitung vorbereiten: 'Es wird bald konkreter' – leistet welchen Beitrag zu diesen drei Fragen? Antwort: keinen. Das ist der Eingang in den Praxisfall.</a:t>
             </a:r>
           </a:p>
         </p:txBody>
@@ -1243,12 +1153,17 @@
           <a:lstStyle/>
           <a:p>
             <a:r>
-              <a:t>Die drei Fragen sind die Merkkarte für das Team-Gespräch. TN kennen sie nach diesem Impuls – AB-1 Schritt 2 und AB-2 Teil C bauen direkt darauf auf.</a:t>
-            </a:r>
-          </a:p>
-          <a:p>
-            <a:r>
-              <a:t>Sandra-Überleitung vorbereiten: 'Es wird bald konkreter' – leistet welchen Beitrag zu diesen drei Fragen? Antwort: keinen. Das ist der Eingang in den Praxisfall.</a:t>
+              <a:t>Diese Folie ist ein Vertrauensmoment im Seminarraum – nicht abschwächen. TN, die sagen 'Das kostet mich mehr als es bringt', haben oft recht – kurzfristig.</a:t>
+            </a:r>
+          </a:p>
+          <a:p>
+            <a:r>
+              <a:t>Reaktion 'Ich wurde dafür bestraft' ernst nehmen: Formulierungsfrage oder Kulturfrage unterscheiden helfen. Der Trainer entscheidet das nicht für die TN, hilft aber bei der Einordnung.</a:t>
+            </a:r>
+          </a:p>
+          <a:p>
+            <a:r>
+              <a:t>Was das Modul verspricht: Beschönigung ist langfristig teurer – für das Vertrauen nach oben UND nach unten. Was es nicht verspricht: dass Ehrlichkeit überall sofort belohnt wird.</a:t>
             </a:r>
           </a:p>
         </p:txBody>
@@ -1318,17 +1233,17 @@
           <a:lstStyle/>
           <a:p>
             <a:r>
-              <a:t>Diese Folie ist ein Vertrauensmoment im Seminarraum – nicht abschwächen. TN, die sagen 'Das kostet mich mehr als es bringt', haben oft recht – kurzfristig.</a:t>
-            </a:r>
-          </a:p>
-          <a:p>
-            <a:r>
-              <a:t>Reaktion 'Ich wurde dafür bestraft' ernst nehmen: Formulierungsfrage oder Kulturfrage unterscheiden helfen. Der Trainer entscheidet das nicht für die TN, hilft aber bei der Einordnung.</a:t>
-            </a:r>
-          </a:p>
-          <a:p>
-            <a:r>
-              <a:t>Was das Modul verspricht: Beschönigung ist langfristig teurer – für das Vertrauen nach oben UND nach unten. Was es nicht verspricht: dass Ehrlichkeit überall sofort belohnt wird.</a:t>
+              <a:t>Servant-Leadership-Anker: Greenleaf (1977) – die dienende Führungskraft vermeidet keine Konflikte, sie steht für ihr Team ein, auch wenn das unbequem ist.</a:t>
+            </a:r>
+          </a:p>
+          <a:p>
+            <a:r>
+              <a:t>Van Dierendonck (2011): Teams unter Führungskräften mit hoher Authentizität und Rückendeckung entwickeln messbar höhere Resilienz in Unsicherheitssituationen. Das ist kein Idealismus, das ist ein Systemparameter.</a:t>
+            </a:r>
+          </a:p>
+          <a:p>
+            <a:r>
+              <a:t>Frage an die Gruppe: In welche Richtung – nach oben oder nach unten – fällt es Ihnen leichter, unbequeme Wahrheiten zu sagen? Kurze Runde, kein Werturteil.</a:t>
             </a:r>
           </a:p>
         </p:txBody>
@@ -1398,17 +1313,32 @@
           <a:lstStyle/>
           <a:p>
             <a:r>
-              <a:t>Servant-Leadership-Anker: Greenleaf (1977) – die dienende Führungskraft vermeidet keine Konflikte, sie steht für ihr Team ein, auch wenn das unbequem ist.</a:t>
-            </a:r>
-          </a:p>
-          <a:p>
-            <a:r>
-              <a:t>Van Dierendonck (2011): Teams unter Führungskräften mit hoher Authentizität und Rückendeckung entwickeln messbar höhere Resilienz in Unsicherheitssituationen. Das ist kein Idealismus, das ist ein Systemparameter.</a:t>
-            </a:r>
-          </a:p>
-          <a:p>
-            <a:r>
-              <a:t>Frage an die Gruppe: In welche Richtung – nach oben oder nach unten – fällt es Ihnen leichter, unbequeme Wahrheiten zu sagen? Kurze Runde, kein Werturteil.</a:t>
+              <a:t>Zeitregie ankündigen: Teil A–C in ca. 10 Min. abschließen, danach ausschließlich Teil D – mindestens 20 Min. Echter Bericht, keine Stichworte.</a:t>
+            </a:r>
+          </a:p>
+          <a:p>
+            <a:r>
+              <a:t>Situation muss real sein – muss aber nicht die sensibelste sein. Ideal: eine Situation, bei der TN in den nächsten zwei Wochen wirklich nach oben berichten müssen.</a:t>
+            </a:r>
+          </a:p>
+          <a:p>
+            <a:r>
+              <a:t>Mindesttiefe bei Teil D prüfen: Kein vollständig ausformulierter Bericht → kein substanzieller Fallberatungsgegenstand. Nach 15 Min. im Raum prüfen: steht da ein echter Bericht oder nur Stichworte?</a:t>
+            </a:r>
+          </a:p>
+          <a:p>
+            <a:r>
+              <a:t>Kollegiale Fallberatung (11:45–12:20): Dreiergruppen. Takt: 3 Min. Fallvorstellung, 6–7 Min. Rückmeldung, 1 Min. Reaktion. Feedback-Fokus: Technisch oder adaptiv richtig diagnostiziert? Sensemaking-Botschaft glaubwürdig? Report vollständig und risikoehrlich?</a:t>
+            </a:r>
+          </a:p>
+          <a:p>
+            <a:r>
+              <a:t>Trainer interveniert nur wenn Gruppe in Ratschläge statt Fragen verfällt: 'Nicht raten – fragen. Was versteht ihr noch nicht an diesem Fall?'</a:t>
+            </a:r>
+          </a:p>
+          <a:p>
+            <a:r>
+              <a:t>Falls TN keine eigene Situation einbringen will: Sandra/agree-Migration als Projektionsfläche – Erkenntnisse mental übertragen.</a:t>
             </a:r>
           </a:p>
         </p:txBody>
@@ -11275,7 +11205,7 @@
             <a:avLst/>
           </a:prstGeom>
           <a:solidFill>
-            <a:srgbClr val="EDEDF3"/>
+            <a:srgbClr val="1F2C56"/>
           </a:solidFill>
           <a:ln>
             <a:noFill/>
@@ -11311,129 +11241,8 @@
         </p:nvSpPr>
         <p:spPr>
           <a:xfrm>
-            <a:off x="0" y="0"/>
-            <a:ext cx="12188952" cy="50292"/>
-          </a:xfrm>
-          <a:prstGeom prst="rect">
-            <a:avLst/>
-          </a:prstGeom>
-          <a:solidFill>
-            <a:srgbClr val="1F2C56"/>
-          </a:solidFill>
-          <a:ln>
-            <a:noFill/>
-          </a:ln>
-        </p:spPr>
-        <p:style>
-          <a:lnRef idx="1">
-            <a:schemeClr val="accent1"/>
-          </a:lnRef>
-          <a:fillRef idx="3">
-            <a:schemeClr val="accent1"/>
-          </a:fillRef>
-          <a:effectRef idx="2">
-            <a:schemeClr val="accent1"/>
-          </a:effectRef>
-          <a:fontRef idx="minor">
-            <a:schemeClr val="lt1"/>
-          </a:fontRef>
-        </p:style>
-        <p:txBody>
-          <a:bodyPr rtlCol="0" anchor="ctr"/>
-          <a:lstStyle/>
-          <a:p>
-            <a:pPr algn="ctr"/>
-          </a:p>
-        </p:txBody>
-      </p:sp>
-      <p:sp>
-        <p:nvSpPr>
-          <p:cNvPr id="4" name="TextBox 3"/>
-          <p:cNvSpPr txBox="1"/>
-          <p:nvPr/>
-        </p:nvSpPr>
-        <p:spPr>
-          <a:xfrm>
-            <a:off x="685800" y="109728"/>
-            <a:ext cx="10817352" cy="228600"/>
-          </a:xfrm>
-          <a:prstGeom prst="rect">
-            <a:avLst/>
-          </a:prstGeom>
-          <a:noFill/>
-        </p:spPr>
-        <p:txBody>
-          <a:bodyPr wrap="none">
-            <a:spAutoFit/>
-          </a:bodyPr>
-          <a:lstStyle/>
-          <a:p>
-            <a:pPr algn="l"/>
-            <a:r>
-              <a:rPr sz="750">
-                <a:solidFill>
-                  <a:srgbClr val="78808C"/>
-                </a:solidFill>
-                <a:latin typeface="Consolas"/>
-              </a:rPr>
-              <a:t>TL10  ·  INHALT</a:t>
-            </a:r>
-          </a:p>
-        </p:txBody>
-      </p:sp>
-      <p:sp>
-        <p:nvSpPr>
-          <p:cNvPr id="5" name="Rectangle 4"/>
-          <p:cNvSpPr/>
-          <p:nvPr/>
-        </p:nvSpPr>
-        <p:spPr>
-          <a:xfrm>
-            <a:off x="0" y="1234440"/>
-            <a:ext cx="12188952" cy="12700"/>
-          </a:xfrm>
-          <a:prstGeom prst="rect">
-            <a:avLst/>
-          </a:prstGeom>
-          <a:solidFill>
-            <a:srgbClr val="D8DFE4"/>
-          </a:solidFill>
-          <a:ln>
-            <a:noFill/>
-          </a:ln>
-        </p:spPr>
-        <p:style>
-          <a:lnRef idx="1">
-            <a:schemeClr val="accent1"/>
-          </a:lnRef>
-          <a:fillRef idx="3">
-            <a:schemeClr val="accent1"/>
-          </a:fillRef>
-          <a:effectRef idx="2">
-            <a:schemeClr val="accent1"/>
-          </a:effectRef>
-          <a:fontRef idx="minor">
-            <a:schemeClr val="lt1"/>
-          </a:fontRef>
-        </p:style>
-        <p:txBody>
-          <a:bodyPr rtlCol="0" anchor="ctr"/>
-          <a:lstStyle/>
-          <a:p>
-            <a:pPr algn="ctr"/>
-          </a:p>
-        </p:txBody>
-      </p:sp>
-      <p:sp>
-        <p:nvSpPr>
-          <p:cNvPr id="6" name="Rectangle 5"/>
-          <p:cNvSpPr/>
-          <p:nvPr/>
-        </p:nvSpPr>
-        <p:spPr>
-          <a:xfrm>
-            <a:off x="685800" y="502920"/>
-            <a:ext cx="36576" cy="658368"/>
+            <a:off x="685800" y="2788920"/>
+            <a:ext cx="548640" cy="38100"/>
           </a:xfrm>
           <a:prstGeom prst="rect">
             <a:avLst/>
@@ -11469,14 +11278,14 @@
       </p:sp>
       <p:sp>
         <p:nvSpPr>
-          <p:cNvPr id="7" name="TextBox 6"/>
+          <p:cNvPr id="4" name="TextBox 3"/>
           <p:cNvSpPr txBox="1"/>
           <p:nvPr/>
         </p:nvSpPr>
         <p:spPr>
           <a:xfrm>
-            <a:off x="813816" y="502920"/>
-            <a:ext cx="10634472" cy="685800"/>
+            <a:off x="685800" y="3017520"/>
+            <a:ext cx="10817352" cy="1463040"/>
           </a:xfrm>
           <a:prstGeom prst="rect">
             <a:avLst/>
@@ -11491,9 +11300,9 @@
           <a:p>
             <a:pPr algn="l"/>
             <a:r>
-              <a:rPr sz="2400" b="1" i="0">
-                <a:solidFill>
-                  <a:srgbClr val="1F2C56"/>
+              <a:rPr sz="4000" b="1" i="0">
+                <a:solidFill>
+                  <a:srgbClr val="FFFFFF"/>
                 </a:solidFill>
                 <a:latin typeface="Arial"/>
               </a:rPr>
@@ -11504,57 +11313,49 @@
       </p:sp>
       <p:sp>
         <p:nvSpPr>
-          <p:cNvPr id="8" name="Rectangle 7"/>
-          <p:cNvSpPr/>
-          <p:nvPr/>
-        </p:nvSpPr>
-        <p:spPr>
-          <a:xfrm>
-            <a:off x="0" y="6510528"/>
-            <a:ext cx="12188952" cy="347472"/>
-          </a:xfrm>
-          <a:prstGeom prst="rect">
-            <a:avLst/>
-          </a:prstGeom>
-          <a:solidFill>
-            <a:srgbClr val="0A1937"/>
-          </a:solidFill>
-          <a:ln>
-            <a:noFill/>
-          </a:ln>
-        </p:spPr>
-        <p:style>
-          <a:lnRef idx="1">
-            <a:schemeClr val="accent1"/>
-          </a:lnRef>
-          <a:fillRef idx="3">
-            <a:schemeClr val="accent1"/>
-          </a:fillRef>
-          <a:effectRef idx="2">
-            <a:schemeClr val="accent1"/>
-          </a:effectRef>
-          <a:fontRef idx="minor">
-            <a:schemeClr val="lt1"/>
-          </a:fontRef>
-        </p:style>
-        <p:txBody>
-          <a:bodyPr rtlCol="0" anchor="ctr"/>
-          <a:lstStyle/>
-          <a:p>
-            <a:pPr algn="ctr"/>
-          </a:p>
-        </p:txBody>
-      </p:sp>
-      <p:sp>
-        <p:nvSpPr>
-          <p:cNvPr id="9" name="TextBox 8"/>
+          <p:cNvPr id="5" name="TextBox 4"/>
           <p:cNvSpPr txBox="1"/>
           <p:nvPr/>
         </p:nvSpPr>
         <p:spPr>
           <a:xfrm>
-            <a:off x="685800" y="6583680"/>
-            <a:ext cx="6490411" cy="256032"/>
+            <a:off x="685800" y="4480560"/>
+            <a:ext cx="8653881" cy="1280160"/>
+          </a:xfrm>
+          <a:prstGeom prst="rect">
+            <a:avLst/>
+          </a:prstGeom>
+          <a:noFill/>
+        </p:spPr>
+        <p:txBody>
+          <a:bodyPr wrap="square">
+            <a:spAutoFit/>
+          </a:bodyPr>
+          <a:lstStyle/>
+          <a:p>
+            <a:pPr algn="l"/>
+            <a:r>
+              <a:rPr sz="1600" b="0" i="0">
+                <a:solidFill>
+                  <a:srgbClr val="C8D2E6"/>
+                </a:solidFill>
+                <a:latin typeface="Arial"/>
+              </a:rPr>
+              <a:t>Und das Abschlussmodul dieses Tracks stellt eine einzige Frage: Wie führst du in ihr?</a:t>
+            </a:r>
+          </a:p>
+        </p:txBody>
+      </p:sp>
+      <p:sp>
+        <p:nvSpPr>
+          <p:cNvPr id="6" name="TextBox 5"/>
+          <p:cNvSpPr txBox="1"/>
+          <p:nvPr/>
+        </p:nvSpPr>
+        <p:spPr>
+          <a:xfrm>
+            <a:off x="685800" y="6355080"/>
+            <a:ext cx="10817352" cy="274320"/>
           </a:xfrm>
           <a:prstGeom prst="rect">
             <a:avLst/>
@@ -11571,7 +11372,7 @@
             <a:r>
               <a:rPr sz="700">
                 <a:solidFill>
-                  <a:srgbClr val="A0B4D2"/>
+                  <a:srgbClr val="8CA0C3"/>
                 </a:solidFill>
                 <a:latin typeface="Consolas"/>
               </a:rPr>

--- a/protected-downloads/praesentation/TL10.pptx
+++ b/protected-downloads/praesentation/TL10.pptx
@@ -27,6 +27,7 @@
     <p:sldId id="275" r:id="rId27"/>
     <p:sldId id="276" r:id="rId28"/>
     <p:sldId id="277" r:id="rId29"/>
+    <p:sldId id="278" r:id="rId30"/>
   </p:sldIdLst>
   <p:sldSz cx="12188952" cy="6858000" type="screen4x3"/>
   <p:notesSz cx="6858000" cy="9144000"/>
@@ -593,22 +594,32 @@
           <a:lstStyle/>
           <a:p>
             <a:r>
-              <a:t>Transferaufgaben kurz einführen, nicht erklären – sie liegen im Workbook.</a:t>
-            </a:r>
-          </a:p>
-          <a:p>
-            <a:r>
-              <a:t>Jeden TN einen konkreten ersten Schritt mit Datum benennen lassen – auf Moderationskarte, TN nehmen sie mit.</a:t>
-            </a:r>
-          </a:p>
-          <a:p>
-            <a:r>
-              <a:t>Folgetermin sofort im Kalender: Die drei Transferaufgaben produzieren genau die Level-3-Evidenz des Moduls. Sie sind kein optionaler Zusatz.</a:t>
-            </a:r>
-          </a:p>
-          <a:p>
-            <a:r>
-              <a:t>Selbstcheck (Sec 5): in Stille ausfüllen, ca. 3 Min., bevor der Abschlussimpuls kommt.</a:t>
+              <a:t>Zeitregie ankündigen: Teil A–C in ca. 10 Min. abschließen, danach ausschließlich Teil D – mindestens 20 Min. Echter Bericht, keine Stichworte.</a:t>
+            </a:r>
+          </a:p>
+          <a:p>
+            <a:r>
+              <a:t>Situation muss real sein – muss aber nicht die sensibelste sein. Ideal: eine Situation, bei der TN in den nächsten zwei Wochen wirklich nach oben berichten müssen.</a:t>
+            </a:r>
+          </a:p>
+          <a:p>
+            <a:r>
+              <a:t>Mindesttiefe bei Teil D prüfen: Kein vollständig ausformulierter Bericht → kein substanzieller Fallberatungsgegenstand. Nach 15 Min. im Raum prüfen: steht da ein echter Bericht oder nur Stichworte?</a:t>
+            </a:r>
+          </a:p>
+          <a:p>
+            <a:r>
+              <a:t>Kollegiale Fallberatung (11:45–12:20): Dreiergruppen. Takt: 3 Min. Fallvorstellung, 6–7 Min. Rückmeldung, 1 Min. Reaktion. Feedback-Fokus: Technisch oder adaptiv richtig diagnostiziert? Sensemaking-Botschaft glaubwürdig? Report vollständig und risikoehrlich?</a:t>
+            </a:r>
+          </a:p>
+          <a:p>
+            <a:r>
+              <a:t>Trainer interveniert nur wenn Gruppe in Ratschläge statt Fragen verfällt: 'Nicht raten – fragen. Was versteht ihr noch nicht an diesem Fall?'</a:t>
+            </a:r>
+          </a:p>
+          <a:p>
+            <a:r>
+              <a:t>Falls TN keine eigene Situation einbringen will: Sandra/agree-Migration als Projektionsfläche – Erkenntnisse mental übertragen.</a:t>
             </a:r>
           </a:p>
         </p:txBody>
@@ -678,6 +689,91 @@
           <a:lstStyle/>
           <a:p>
             <a:r>
+              <a:t>Transferaufgaben kurz einführen, nicht erklären – sie liegen im Workbook.</a:t>
+            </a:r>
+          </a:p>
+          <a:p>
+            <a:r>
+              <a:t>Jeden TN einen konkreten ersten Schritt mit Datum benennen lassen – auf Moderationskarte, TN nehmen sie mit.</a:t>
+            </a:r>
+          </a:p>
+          <a:p>
+            <a:r>
+              <a:t>Folgetermin sofort im Kalender: Die drei Transferaufgaben produzieren genau die Level-3-Evidenz des Moduls. Sie sind kein optionaler Zusatz.</a:t>
+            </a:r>
+          </a:p>
+          <a:p>
+            <a:r>
+              <a:t>Selbstcheck (Sec 5): in Stille ausfüllen, ca. 3 Min., bevor der Abschlussimpuls kommt.</a:t>
+            </a:r>
+          </a:p>
+        </p:txBody>
+      </p:sp>
+      <p:sp>
+        <p:nvSpPr>
+          <p:cNvPr id="4" name="Slide Number Placeholder 3"/>
+          <p:cNvSpPr>
+            <a:spLocks noGrp="1"/>
+          </p:cNvSpPr>
+          <p:nvPr>
+            <p:ph type="sldNum" idx="5" sz="quarter"/>
+          </p:nvPr>
+        </p:nvSpPr>
+        <p:spPr/>
+      </p:sp>
+    </p:spTree>
+  </p:cSld>
+  <p:clrMapOvr>
+    <a:masterClrMapping/>
+  </p:clrMapOvr>
+</p:notes>
+</file>
+
+<file path=ppt/notesSlides/notesSlide12.xml><?xml version="1.0" encoding="utf-8"?>
+<p:notes xmlns:a="http://schemas.openxmlformats.org/drawingml/2006/main" xmlns:p="http://schemas.openxmlformats.org/presentationml/2006/main" xmlns:r="http://schemas.openxmlformats.org/officeDocument/2006/relationships">
+  <p:cSld>
+    <p:spTree>
+      <p:nvGrpSpPr>
+        <p:cNvPr id="1" name=""/>
+        <p:cNvGrpSpPr/>
+        <p:nvPr/>
+      </p:nvGrpSpPr>
+      <p:grpSpPr>
+        <a:xfrm>
+          <a:off x="0" y="0"/>
+          <a:ext cx="0" cy="0"/>
+          <a:chOff x="0" y="0"/>
+          <a:chExt cx="0" cy="0"/>
+        </a:xfrm>
+      </p:grpSpPr>
+      <p:sp>
+        <p:nvSpPr>
+          <p:cNvPr id="2" name="Slide Image Placeholder 1"/>
+          <p:cNvSpPr>
+            <a:spLocks noGrp="1"/>
+          </p:cNvSpPr>
+          <p:nvPr>
+            <p:ph type="sldImg" idx="2"/>
+          </p:nvPr>
+        </p:nvSpPr>
+        <p:spPr/>
+      </p:sp>
+      <p:sp>
+        <p:nvSpPr>
+          <p:cNvPr id="3" name="Notes Placeholder 2"/>
+          <p:cNvSpPr>
+            <a:spLocks noGrp="1"/>
+          </p:cNvSpPr>
+          <p:nvPr>
+            <p:ph type="body" idx="3" sz="quarter"/>
+          </p:nvPr>
+        </p:nvSpPr>
+        <p:spPr/>
+        <p:txBody>
+          <a:bodyPr/>
+          <a:lstStyle/>
+          <a:p>
+            <a:r>
               <a:t>Abschlussrunde (1 Satz pro TN): Was nehme ich aus diesem Track mit – nicht nur aus TL10?</a:t>
             </a:r>
           </a:p>
@@ -1313,32 +1409,27 @@
           <a:lstStyle/>
           <a:p>
             <a:r>
-              <a:t>Zeitregie ankündigen: Teil A–C in ca. 10 Min. abschließen, danach ausschließlich Teil D – mindestens 20 Min. Echter Bericht, keine Stichworte.</a:t>
-            </a:r>
-          </a:p>
-          <a:p>
-            <a:r>
-              <a:t>Situation muss real sein – muss aber nicht die sensibelste sein. Ideal: eine Situation, bei der TN in den nächsten zwei Wochen wirklich nach oben berichten müssen.</a:t>
-            </a:r>
-          </a:p>
-          <a:p>
-            <a:r>
-              <a:t>Mindesttiefe bei Teil D prüfen: Kein vollständig ausformulierter Bericht → kein substanzieller Fallberatungsgegenstand. Nach 15 Min. im Raum prüfen: steht da ein echter Bericht oder nur Stichworte?</a:t>
-            </a:r>
-          </a:p>
-          <a:p>
-            <a:r>
-              <a:t>Kollegiale Fallberatung (11:45–12:20): Dreiergruppen. Takt: 3 Min. Fallvorstellung, 6–7 Min. Rückmeldung, 1 Min. Reaktion. Feedback-Fokus: Technisch oder adaptiv richtig diagnostiziert? Sensemaking-Botschaft glaubwürdig? Report vollständig und risikoehrlich?</a:t>
-            </a:r>
-          </a:p>
-          <a:p>
-            <a:r>
-              <a:t>Trainer interveniert nur wenn Gruppe in Ratschläge statt Fragen verfällt: 'Nicht raten – fragen. Was versteht ihr noch nicht an diesem Fall?'</a:t>
-            </a:r>
-          </a:p>
-          <a:p>
-            <a:r>
-              <a:t>Falls TN keine eigene Situation einbringen will: Sandra/agree-Migration als Projektionsfläche – Erkenntnisse mental übertragen.</a:t>
+              <a:t>Falltext liegt im Workbook TN-Unterlagen – TN lesen ihn in ca. 3 Min. selbst, Trainer liest ihn nicht vor.</a:t>
+            </a:r>
+          </a:p>
+          <a:p>
+            <a:r>
+              <a:t>AB-1 Schritte 1–4: Einzelarbeit ca. 20 Min. (10:25–10:50). Trainer bleibt ansprechbar, greift nicht ein.</a:t>
+            </a:r>
+          </a:p>
+          <a:p>
+            <a:r>
+              <a:t>AB-1-Besprechung Plenum (10:50–11:05): Trainer lässt TN Schritt 3 (Report-Analyse) vorstellen; Fokus: Welches Element fehlt – und was hält Sandra davon ab, es zu schreiben?</a:t>
+            </a:r>
+          </a:p>
+          <a:p>
+            <a:r>
+              <a:t>Stiller Moment beim Schritt 3: Wenn das Team sieht, dass drei von fünf Elementen fehlen, entsteht oft ein stilles Erkennen – 'Das schreibe ich genauso.' Diesen Moment nicht durch sofortige Kommentierung schließen.</a:t>
+            </a:r>
+          </a:p>
+          <a:p>
+            <a:r>
+              <a:t>Schritt 4 (doppelte Loyalität): Was würde Maria denken, wenn sie Sandras Entwurf mitlesen würde? TN nennen es selbst – Trainer hält zurück.</a:t>
             </a:r>
           </a:p>
         </p:txBody>
@@ -7844,6 +7935,49 @@
             <a:avLst/>
           </a:prstGeom>
           <a:solidFill>
+            <a:srgbClr val="EDEDF3"/>
+          </a:solidFill>
+          <a:ln>
+            <a:noFill/>
+          </a:ln>
+        </p:spPr>
+        <p:style>
+          <a:lnRef idx="1">
+            <a:schemeClr val="accent1"/>
+          </a:lnRef>
+          <a:fillRef idx="3">
+            <a:schemeClr val="accent1"/>
+          </a:fillRef>
+          <a:effectRef idx="2">
+            <a:schemeClr val="accent1"/>
+          </a:effectRef>
+          <a:fontRef idx="minor">
+            <a:schemeClr val="lt1"/>
+          </a:fontRef>
+        </p:style>
+        <p:txBody>
+          <a:bodyPr rtlCol="0" anchor="ctr"/>
+          <a:lstStyle/>
+          <a:p>
+            <a:pPr algn="ctr"/>
+          </a:p>
+        </p:txBody>
+      </p:sp>
+      <p:sp>
+        <p:nvSpPr>
+          <p:cNvPr id="3" name="Rectangle 2"/>
+          <p:cNvSpPr/>
+          <p:nvPr/>
+        </p:nvSpPr>
+        <p:spPr>
+          <a:xfrm>
+            <a:off x="0" y="0"/>
+            <a:ext cx="12188952" cy="50292"/>
+          </a:xfrm>
+          <a:prstGeom prst="rect">
+            <a:avLst/>
+          </a:prstGeom>
+          <a:solidFill>
             <a:srgbClr val="1F2C56"/>
           </a:solidFill>
           <a:ln>
@@ -7874,14 +8008,14 @@
       </p:sp>
       <p:sp>
         <p:nvSpPr>
-          <p:cNvPr id="3" name="TextBox 2"/>
+          <p:cNvPr id="4" name="TextBox 3"/>
           <p:cNvSpPr txBox="1"/>
           <p:nvPr/>
         </p:nvSpPr>
         <p:spPr>
           <a:xfrm>
-            <a:off x="685800" y="2377440"/>
-            <a:ext cx="10817352" cy="365760"/>
+            <a:off x="685800" y="109728"/>
+            <a:ext cx="10817352" cy="228600"/>
           </a:xfrm>
           <a:prstGeom prst="rect">
             <a:avLst/>
@@ -7896,27 +8030,70 @@
           <a:p>
             <a:pPr algn="l"/>
             <a:r>
-              <a:rPr sz="1200">
-                <a:solidFill>
-                  <a:srgbClr val="D9C089"/>
+              <a:rPr sz="750">
+                <a:solidFill>
+                  <a:srgbClr val="78808C"/>
                 </a:solidFill>
                 <a:latin typeface="Consolas"/>
               </a:rPr>
-              <a:t>EINZELARBEIT (40 MIN.) + KOLLEGIALE FALLBERATUNG (35 MIN.)</a:t>
-            </a:r>
-          </a:p>
-        </p:txBody>
-      </p:sp>
-      <p:sp>
-        <p:nvSpPr>
-          <p:cNvPr id="4" name="Rectangle 3"/>
+              <a:t>TL10  ·  PRAXISFALL</a:t>
+            </a:r>
+          </a:p>
+        </p:txBody>
+      </p:sp>
+      <p:sp>
+        <p:nvSpPr>
+          <p:cNvPr id="5" name="Rectangle 4"/>
           <p:cNvSpPr/>
           <p:nvPr/>
         </p:nvSpPr>
         <p:spPr>
           <a:xfrm>
-            <a:off x="685800" y="2788920"/>
-            <a:ext cx="548640" cy="38100"/>
+            <a:off x="0" y="1234440"/>
+            <a:ext cx="12188952" cy="12700"/>
+          </a:xfrm>
+          <a:prstGeom prst="rect">
+            <a:avLst/>
+          </a:prstGeom>
+          <a:solidFill>
+            <a:srgbClr val="D8DFE4"/>
+          </a:solidFill>
+          <a:ln>
+            <a:noFill/>
+          </a:ln>
+        </p:spPr>
+        <p:style>
+          <a:lnRef idx="1">
+            <a:schemeClr val="accent1"/>
+          </a:lnRef>
+          <a:fillRef idx="3">
+            <a:schemeClr val="accent1"/>
+          </a:fillRef>
+          <a:effectRef idx="2">
+            <a:schemeClr val="accent1"/>
+          </a:effectRef>
+          <a:fontRef idx="minor">
+            <a:schemeClr val="lt1"/>
+          </a:fontRef>
+        </p:style>
+        <p:txBody>
+          <a:bodyPr rtlCol="0" anchor="ctr"/>
+          <a:lstStyle/>
+          <a:p>
+            <a:pPr algn="ctr"/>
+          </a:p>
+        </p:txBody>
+      </p:sp>
+      <p:sp>
+        <p:nvSpPr>
+          <p:cNvPr id="6" name="Rectangle 5"/>
+          <p:cNvSpPr/>
+          <p:nvPr/>
+        </p:nvSpPr>
+        <p:spPr>
+          <a:xfrm>
+            <a:off x="685800" y="502920"/>
+            <a:ext cx="36576" cy="658368"/>
           </a:xfrm>
           <a:prstGeom prst="rect">
             <a:avLst/>
@@ -7952,14 +8129,14 @@
       </p:sp>
       <p:sp>
         <p:nvSpPr>
-          <p:cNvPr id="5" name="TextBox 4"/>
+          <p:cNvPr id="7" name="TextBox 6"/>
           <p:cNvSpPr txBox="1"/>
           <p:nvPr/>
         </p:nvSpPr>
         <p:spPr>
           <a:xfrm>
-            <a:off x="685800" y="3017520"/>
-            <a:ext cx="10817352" cy="1463040"/>
+            <a:off x="813816" y="502920"/>
+            <a:ext cx="10634472" cy="685800"/>
           </a:xfrm>
           <a:prstGeom prst="rect">
             <a:avLst/>
@@ -7974,27 +8151,150 @@
           <a:p>
             <a:pPr algn="l"/>
             <a:r>
-              <a:rPr sz="4000" b="1" i="0">
-                <a:solidFill>
-                  <a:srgbClr val="FFFFFF"/>
+              <a:rPr sz="2400" b="1" i="0">
+                <a:solidFill>
+                  <a:srgbClr val="1F2C56"/>
                 </a:solidFill>
                 <a:latin typeface="Arial"/>
               </a:rPr>
-              <a:t>AB-2: Eigener Fall – Report-nach-oben-Konzept für eine reale Situation</a:t>
-            </a:r>
-          </a:p>
-        </p:txBody>
-      </p:sp>
-      <p:sp>
-        <p:nvSpPr>
-          <p:cNvPr id="6" name="TextBox 5"/>
+              <a:t>Teamleiterin Sandra P. – VR-Bank Musterregion eG, Firmenkunden-Team</a:t>
+            </a:r>
+          </a:p>
+        </p:txBody>
+      </p:sp>
+      <p:sp>
+        <p:nvSpPr>
+          <p:cNvPr id="8" name="Rectangle 7"/>
+          <p:cNvSpPr/>
+          <p:nvPr/>
+        </p:nvSpPr>
+        <p:spPr>
+          <a:xfrm>
+            <a:off x="685800" y="1600200"/>
+            <a:ext cx="10817352" cy="2156928"/>
+          </a:xfrm>
+          <a:prstGeom prst="rect">
+            <a:avLst/>
+          </a:prstGeom>
+          <a:solidFill>
+            <a:srgbClr val="FFFFFF"/>
+          </a:solidFill>
+          <a:ln w="9525">
+            <a:solidFill>
+              <a:srgbClr val="D8DFE4"/>
+            </a:solidFill>
+          </a:ln>
+        </p:spPr>
+        <p:style>
+          <a:lnRef idx="1">
+            <a:schemeClr val="accent1"/>
+          </a:lnRef>
+          <a:fillRef idx="3">
+            <a:schemeClr val="accent1"/>
+          </a:fillRef>
+          <a:effectRef idx="2">
+            <a:schemeClr val="accent1"/>
+          </a:effectRef>
+          <a:fontRef idx="minor">
+            <a:schemeClr val="lt1"/>
+          </a:fontRef>
+        </p:style>
+        <p:txBody>
+          <a:bodyPr rtlCol="0" anchor="ctr"/>
+          <a:lstStyle/>
+          <a:p>
+            <a:pPr algn="ctr"/>
+          </a:p>
+        </p:txBody>
+      </p:sp>
+      <p:sp>
+        <p:nvSpPr>
+          <p:cNvPr id="9" name="Rectangle 8"/>
+          <p:cNvSpPr/>
+          <p:nvPr/>
+        </p:nvSpPr>
+        <p:spPr>
+          <a:xfrm>
+            <a:off x="685800" y="1600200"/>
+            <a:ext cx="36576" cy="2156928"/>
+          </a:xfrm>
+          <a:prstGeom prst="rect">
+            <a:avLst/>
+          </a:prstGeom>
+          <a:solidFill>
+            <a:srgbClr val="1F2C56"/>
+          </a:solidFill>
+          <a:ln>
+            <a:noFill/>
+          </a:ln>
+        </p:spPr>
+        <p:style>
+          <a:lnRef idx="1">
+            <a:schemeClr val="accent1"/>
+          </a:lnRef>
+          <a:fillRef idx="3">
+            <a:schemeClr val="accent1"/>
+          </a:fillRef>
+          <a:effectRef idx="2">
+            <a:schemeClr val="accent1"/>
+          </a:effectRef>
+          <a:fontRef idx="minor">
+            <a:schemeClr val="lt1"/>
+          </a:fontRef>
+        </p:style>
+        <p:txBody>
+          <a:bodyPr rtlCol="0" anchor="ctr"/>
+          <a:lstStyle/>
+          <a:p>
+            <a:pPr algn="ctr"/>
+          </a:p>
+        </p:txBody>
+      </p:sp>
+      <p:sp>
+        <p:nvSpPr>
+          <p:cNvPr id="10" name="TextBox 9"/>
           <p:cNvSpPr txBox="1"/>
           <p:nvPr/>
         </p:nvSpPr>
         <p:spPr>
           <a:xfrm>
-            <a:off x="685800" y="4480560"/>
-            <a:ext cx="8653881" cy="1280160"/>
+            <a:off x="941832" y="1783080"/>
+            <a:ext cx="10268712" cy="228600"/>
+          </a:xfrm>
+          <a:prstGeom prst="rect">
+            <a:avLst/>
+          </a:prstGeom>
+          <a:noFill/>
+        </p:spPr>
+        <p:txBody>
+          <a:bodyPr wrap="none">
+            <a:spAutoFit/>
+          </a:bodyPr>
+          <a:lstStyle/>
+          <a:p>
+            <a:pPr algn="l"/>
+            <a:r>
+              <a:rPr sz="750">
+                <a:solidFill>
+                  <a:srgbClr val="78808C"/>
+                </a:solidFill>
+                <a:latin typeface="Consolas"/>
+              </a:rPr>
+              <a:t>AUSGANGSSITUATION</a:t>
+            </a:r>
+          </a:p>
+        </p:txBody>
+      </p:sp>
+      <p:sp>
+        <p:nvSpPr>
+          <p:cNvPr id="11" name="TextBox 10"/>
+          <p:cNvSpPr txBox="1"/>
+          <p:nvPr/>
+        </p:nvSpPr>
+        <p:spPr>
+          <a:xfrm>
+            <a:off x="941832" y="2084831"/>
+            <a:ext cx="7680960" cy="1516848"/>
           </a:xfrm>
           <a:prstGeom prst="rect">
             <a:avLst/>
@@ -8007,29 +8307,77 @@
           </a:bodyPr>
           <a:lstStyle/>
           <a:p>
-            <a:pPr algn="l"/>
-            <a:r>
-              <a:rPr sz="1600" b="0" i="0">
-                <a:solidFill>
-                  <a:srgbClr val="C8D2E6"/>
+            <a:pPr>
+              <a:spcAft>
+                <a:spcPts val="600"/>
+              </a:spcAft>
+            </a:pPr>
+            <a:r>
+              <a:rPr sz="1300">
+                <a:solidFill>
+                  <a:srgbClr val="3D5466"/>
                 </a:solidFill>
                 <a:latin typeface="Arial"/>
               </a:rPr>
-              <a:t>Integriertes Report-Konzept für eine eigene aktuelle Unsicherheitssituation entwickeln</a:t>
-            </a:r>
-          </a:p>
-        </p:txBody>
-      </p:sp>
-      <p:sp>
-        <p:nvSpPr>
-          <p:cNvPr id="7" name="TextBox 6"/>
+              <a:t>agree BAP FK 2.0 – Go-Live seit Monaten verschoben, Zeitplan „noch nicht final bestätigt". Vorstand erwartet monatliche Berichte und geht „von planmäßiger Umsetzung" aus. Zwei erfahrene Berater (je 15+ Jahre) fühlen sich nach gründlicher Vorbereitung im Stich gelassen; Maria K. fragt regelmäßig im Flur: „Sandra, wann wird das wirklich was?" Sandras bisherige Antwort: „Es wird bald konkreter." Zwei Kreditvorgänge (je ca. 400 TEUR) hängen an Prozessunsicherheiten – im Bericht an den Vorstand bisher nicht erwähnt. Sandras erster Entwurf: „Das Team ist gut vorbereitet. Die Zahlen liegen leicht unter Plan, was auf Saisonalität zurückzuführen ist. Wir haben die Situation im Griff." Sie schickt ihn noch nicht ab.
+</a:t>
+            </a:r>
+          </a:p>
+        </p:txBody>
+      </p:sp>
+      <p:sp>
+        <p:nvSpPr>
+          <p:cNvPr id="12" name="Rectangle 11"/>
+          <p:cNvSpPr/>
+          <p:nvPr/>
+        </p:nvSpPr>
+        <p:spPr>
+          <a:xfrm>
+            <a:off x="0" y="6510528"/>
+            <a:ext cx="12188952" cy="347472"/>
+          </a:xfrm>
+          <a:prstGeom prst="rect">
+            <a:avLst/>
+          </a:prstGeom>
+          <a:solidFill>
+            <a:srgbClr val="0A1937"/>
+          </a:solidFill>
+          <a:ln>
+            <a:noFill/>
+          </a:ln>
+        </p:spPr>
+        <p:style>
+          <a:lnRef idx="1">
+            <a:schemeClr val="accent1"/>
+          </a:lnRef>
+          <a:fillRef idx="3">
+            <a:schemeClr val="accent1"/>
+          </a:fillRef>
+          <a:effectRef idx="2">
+            <a:schemeClr val="accent1"/>
+          </a:effectRef>
+          <a:fontRef idx="minor">
+            <a:schemeClr val="lt1"/>
+          </a:fontRef>
+        </p:style>
+        <p:txBody>
+          <a:bodyPr rtlCol="0" anchor="ctr"/>
+          <a:lstStyle/>
+          <a:p>
+            <a:pPr algn="ctr"/>
+          </a:p>
+        </p:txBody>
+      </p:sp>
+      <p:sp>
+        <p:nvSpPr>
+          <p:cNvPr id="13" name="TextBox 12"/>
           <p:cNvSpPr txBox="1"/>
           <p:nvPr/>
         </p:nvSpPr>
         <p:spPr>
           <a:xfrm>
-            <a:off x="685800" y="6355080"/>
-            <a:ext cx="10817352" cy="274320"/>
+            <a:off x="685800" y="6583680"/>
+            <a:ext cx="6490411" cy="256032"/>
           </a:xfrm>
           <a:prstGeom prst="rect">
             <a:avLst/>
@@ -8046,11 +8394,46 @@
             <a:r>
               <a:rPr sz="700">
                 <a:solidFill>
-                  <a:srgbClr val="8CA0C3"/>
+                  <a:srgbClr val="A0B4D2"/>
                 </a:solidFill>
                 <a:latin typeface="Consolas"/>
               </a:rPr>
               <a:t>FKB Campus  ·  TL10</a:t>
+            </a:r>
+          </a:p>
+        </p:txBody>
+      </p:sp>
+      <p:sp>
+        <p:nvSpPr>
+          <p:cNvPr id="14" name="TextBox 13"/>
+          <p:cNvSpPr txBox="1"/>
+          <p:nvPr/>
+        </p:nvSpPr>
+        <p:spPr>
+          <a:xfrm>
+            <a:off x="7176211" y="6583680"/>
+            <a:ext cx="4326940" cy="256032"/>
+          </a:xfrm>
+          <a:prstGeom prst="rect">
+            <a:avLst/>
+          </a:prstGeom>
+          <a:noFill/>
+        </p:spPr>
+        <p:txBody>
+          <a:bodyPr wrap="none">
+            <a:spAutoFit/>
+          </a:bodyPr>
+          <a:lstStyle/>
+          <a:p>
+            <a:pPr algn="r"/>
+            <a:r>
+              <a:rPr sz="700">
+                <a:solidFill>
+                  <a:srgbClr val="A0B4D2"/>
+                </a:solidFill>
+                <a:latin typeface="Consolas"/>
+              </a:rPr>
+              <a:t>Fall zuerst lesen</a:t>
             </a:r>
           </a:p>
         </p:txBody>
@@ -8088,7 +8471,7 @@
             <a:avLst/>
           </a:prstGeom>
           <a:solidFill>
-            <a:srgbClr val="EDEDF3"/>
+            <a:srgbClr val="1F2C56"/>
           </a:solidFill>
           <a:ln>
             <a:noFill/>
@@ -8118,57 +8501,14 @@
       </p:sp>
       <p:sp>
         <p:nvSpPr>
-          <p:cNvPr id="3" name="Rectangle 2"/>
-          <p:cNvSpPr/>
-          <p:nvPr/>
-        </p:nvSpPr>
-        <p:spPr>
-          <a:xfrm>
-            <a:off x="0" y="0"/>
-            <a:ext cx="12188952" cy="50292"/>
-          </a:xfrm>
-          <a:prstGeom prst="rect">
-            <a:avLst/>
-          </a:prstGeom>
-          <a:solidFill>
-            <a:srgbClr val="1F2C56"/>
-          </a:solidFill>
-          <a:ln>
-            <a:noFill/>
-          </a:ln>
-        </p:spPr>
-        <p:style>
-          <a:lnRef idx="1">
-            <a:schemeClr val="accent1"/>
-          </a:lnRef>
-          <a:fillRef idx="3">
-            <a:schemeClr val="accent1"/>
-          </a:fillRef>
-          <a:effectRef idx="2">
-            <a:schemeClr val="accent1"/>
-          </a:effectRef>
-          <a:fontRef idx="minor">
-            <a:schemeClr val="lt1"/>
-          </a:fontRef>
-        </p:style>
-        <p:txBody>
-          <a:bodyPr rtlCol="0" anchor="ctr"/>
-          <a:lstStyle/>
-          <a:p>
-            <a:pPr algn="ctr"/>
-          </a:p>
-        </p:txBody>
-      </p:sp>
-      <p:sp>
-        <p:nvSpPr>
-          <p:cNvPr id="4" name="TextBox 3"/>
+          <p:cNvPr id="3" name="TextBox 2"/>
           <p:cNvSpPr txBox="1"/>
           <p:nvPr/>
         </p:nvSpPr>
         <p:spPr>
           <a:xfrm>
-            <a:off x="685800" y="109728"/>
-            <a:ext cx="10817352" cy="228600"/>
+            <a:off x="685800" y="2377440"/>
+            <a:ext cx="10817352" cy="365760"/>
           </a:xfrm>
           <a:prstGeom prst="rect">
             <a:avLst/>
@@ -8183,70 +8523,27 @@
           <a:p>
             <a:pPr algn="l"/>
             <a:r>
-              <a:rPr sz="750">
-                <a:solidFill>
-                  <a:srgbClr val="78808C"/>
+              <a:rPr sz="1200">
+                <a:solidFill>
+                  <a:srgbClr val="D9C089"/>
                 </a:solidFill>
                 <a:latin typeface="Consolas"/>
               </a:rPr>
-              <a:t>TL10  ·  ARBEITSBLATT</a:t>
-            </a:r>
-          </a:p>
-        </p:txBody>
-      </p:sp>
-      <p:sp>
-        <p:nvSpPr>
-          <p:cNvPr id="5" name="Rectangle 4"/>
+              <a:t>EINZELARBEIT (40 MIN.) + KOLLEGIALE FALLBERATUNG (35 MIN.)</a:t>
+            </a:r>
+          </a:p>
+        </p:txBody>
+      </p:sp>
+      <p:sp>
+        <p:nvSpPr>
+          <p:cNvPr id="4" name="Rectangle 3"/>
           <p:cNvSpPr/>
           <p:nvPr/>
         </p:nvSpPr>
         <p:spPr>
           <a:xfrm>
-            <a:off x="0" y="1234440"/>
-            <a:ext cx="12188952" cy="12700"/>
-          </a:xfrm>
-          <a:prstGeom prst="rect">
-            <a:avLst/>
-          </a:prstGeom>
-          <a:solidFill>
-            <a:srgbClr val="D8DFE4"/>
-          </a:solidFill>
-          <a:ln>
-            <a:noFill/>
-          </a:ln>
-        </p:spPr>
-        <p:style>
-          <a:lnRef idx="1">
-            <a:schemeClr val="accent1"/>
-          </a:lnRef>
-          <a:fillRef idx="3">
-            <a:schemeClr val="accent1"/>
-          </a:fillRef>
-          <a:effectRef idx="2">
-            <a:schemeClr val="accent1"/>
-          </a:effectRef>
-          <a:fontRef idx="minor">
-            <a:schemeClr val="lt1"/>
-          </a:fontRef>
-        </p:style>
-        <p:txBody>
-          <a:bodyPr rtlCol="0" anchor="ctr"/>
-          <a:lstStyle/>
-          <a:p>
-            <a:pPr algn="ctr"/>
-          </a:p>
-        </p:txBody>
-      </p:sp>
-      <p:sp>
-        <p:nvSpPr>
-          <p:cNvPr id="6" name="Rectangle 5"/>
-          <p:cNvSpPr/>
-          <p:nvPr/>
-        </p:nvSpPr>
-        <p:spPr>
-          <a:xfrm>
-            <a:off x="685800" y="502920"/>
-            <a:ext cx="36576" cy="658368"/>
+            <a:off x="685800" y="2788920"/>
+            <a:ext cx="548640" cy="38100"/>
           </a:xfrm>
           <a:prstGeom prst="rect">
             <a:avLst/>
@@ -8282,14 +8579,14 @@
       </p:sp>
       <p:sp>
         <p:nvSpPr>
-          <p:cNvPr id="7" name="TextBox 6"/>
+          <p:cNvPr id="5" name="TextBox 4"/>
           <p:cNvSpPr txBox="1"/>
           <p:nvPr/>
         </p:nvSpPr>
         <p:spPr>
           <a:xfrm>
-            <a:off x="813816" y="502920"/>
-            <a:ext cx="10634472" cy="685800"/>
+            <a:off x="685800" y="3017520"/>
+            <a:ext cx="10817352" cy="1463040"/>
           </a:xfrm>
           <a:prstGeom prst="rect">
             <a:avLst/>
@@ -8304,27 +8601,27 @@
           <a:p>
             <a:pPr algn="l"/>
             <a:r>
-              <a:rPr sz="2400" b="1" i="0">
-                <a:solidFill>
-                  <a:srgbClr val="1F2C56"/>
+              <a:rPr sz="4000" b="1" i="0">
+                <a:solidFill>
+                  <a:srgbClr val="FFFFFF"/>
                 </a:solidFill>
                 <a:latin typeface="Arial"/>
               </a:rPr>
-              <a:t>AB-2: Die fünf Bausteine – vollständig, nicht nur als Stichworte</a:t>
-            </a:r>
-          </a:p>
-        </p:txBody>
-      </p:sp>
-      <p:sp>
-        <p:nvSpPr>
-          <p:cNvPr id="8" name="TextBox 7"/>
+              <a:t>AB-2: Eigener Fall – Report-nach-oben-Konzept für eine reale Situation</a:t>
+            </a:r>
+          </a:p>
+        </p:txBody>
+      </p:sp>
+      <p:sp>
+        <p:nvSpPr>
+          <p:cNvPr id="6" name="TextBox 5"/>
           <p:cNvSpPr txBox="1"/>
           <p:nvPr/>
         </p:nvSpPr>
         <p:spPr>
           <a:xfrm>
-            <a:off x="685800" y="1554480"/>
-            <a:ext cx="10817352" cy="3840480"/>
+            <a:off x="685800" y="4480560"/>
+            <a:ext cx="8653881" cy="1280160"/>
           </a:xfrm>
           <a:prstGeom prst="rect">
             <a:avLst/>
@@ -8337,233 +8634,29 @@
           </a:bodyPr>
           <a:lstStyle/>
           <a:p>
-            <a:pPr marL="190500" indent="-190500">
-              <a:spcBef>
-                <a:spcPts val="400"/>
-              </a:spcBef>
-              <a:spcAft>
-                <a:spcPts val="200"/>
-              </a:spcAft>
-            </a:pPr>
-            <a:r>
-              <a:rPr sz="1400">
-                <a:solidFill>
-                  <a:srgbClr val="3D5466"/>
+            <a:pPr algn="l"/>
+            <a:r>
+              <a:rPr sz="1600" b="0" i="0">
+                <a:solidFill>
+                  <a:srgbClr val="C8D2E6"/>
                 </a:solidFill>
                 <a:latin typeface="Arial"/>
               </a:rPr>
-              <a:t>▸  Teil A: Situation – Was ist unklar, für wen, welche Cues?</a:t>
-            </a:r>
-          </a:p>
-          <a:p>
-            <a:pPr marL="190500" indent="-190500">
-              <a:spcBef>
-                <a:spcPts val="400"/>
-              </a:spcBef>
-              <a:spcAft>
-                <a:spcPts val="200"/>
-              </a:spcAft>
-            </a:pPr>
-            <a:r>
-              <a:rPr sz="1400">
-                <a:solidFill>
-                  <a:srgbClr val="3D5466"/>
-                </a:solidFill>
-                <a:latin typeface="Arial"/>
-              </a:rPr>
-              <a:t>▸  Teil B: Herausforderungs-Typ – technisch, adaptiv oder beides?</a:t>
-            </a:r>
-          </a:p>
-          <a:p>
-            <a:pPr marL="190500" indent="-190500">
-              <a:spcBef>
-                <a:spcPts val="400"/>
-              </a:spcBef>
-              <a:spcAft>
-                <a:spcPts val="200"/>
-              </a:spcAft>
-            </a:pPr>
-            <a:r>
-              <a:rPr sz="1400">
-                <a:solidFill>
-                  <a:srgbClr val="3D5466"/>
-                </a:solidFill>
-                <a:latin typeface="Arial"/>
-              </a:rPr>
-              <a:t>▸  Teil C: Sensemaking-Botschaft ans Team – drei Sätze ohne Beschönigung.</a:t>
-            </a:r>
-          </a:p>
-          <a:p>
-            <a:pPr marL="190500" indent="-190500">
-              <a:spcBef>
-                <a:spcPts val="400"/>
-              </a:spcBef>
-              <a:spcAft>
-                <a:spcPts val="200"/>
-              </a:spcAft>
-            </a:pPr>
-            <a:r>
-              <a:rPr sz="1400">
-                <a:solidFill>
-                  <a:srgbClr val="3D5466"/>
-                </a:solidFill>
-                <a:latin typeface="Arial"/>
-              </a:rPr>
-              <a:t>▸  Teil D: Report nach oben – fünf Strukturelemente vollständig ausformuliert.</a:t>
-            </a:r>
-          </a:p>
-          <a:p>
-            <a:pPr marL="190500" indent="-190500">
-              <a:spcBef>
-                <a:spcPts val="400"/>
-              </a:spcBef>
-              <a:spcAft>
-                <a:spcPts val="200"/>
-              </a:spcAft>
-            </a:pPr>
-            <a:r>
-              <a:rPr sz="1400">
-                <a:solidFill>
-                  <a:srgbClr val="3D5466"/>
-                </a:solidFill>
-                <a:latin typeface="Arial"/>
-              </a:rPr>
-              <a:t>▸  Teil E: Doppelte Loyalität – persönliche Standortbestimmung.</a:t>
-            </a:r>
-          </a:p>
-        </p:txBody>
-      </p:sp>
-      <p:sp>
-        <p:nvSpPr>
-          <p:cNvPr id="9" name="Rectangle 8"/>
-          <p:cNvSpPr/>
-          <p:nvPr/>
-        </p:nvSpPr>
-        <p:spPr>
-          <a:xfrm>
-            <a:off x="685800" y="5486400"/>
-            <a:ext cx="10817352" cy="640080"/>
-          </a:xfrm>
-          <a:prstGeom prst="rect">
-            <a:avLst/>
-          </a:prstGeom>
-          <a:solidFill>
-            <a:srgbClr val="1F2C56"/>
-          </a:solidFill>
-          <a:ln>
-            <a:noFill/>
-          </a:ln>
-        </p:spPr>
-        <p:style>
-          <a:lnRef idx="1">
-            <a:schemeClr val="accent1"/>
-          </a:lnRef>
-          <a:fillRef idx="3">
-            <a:schemeClr val="accent1"/>
-          </a:fillRef>
-          <a:effectRef idx="2">
-            <a:schemeClr val="accent1"/>
-          </a:effectRef>
-          <a:fontRef idx="minor">
-            <a:schemeClr val="lt1"/>
-          </a:fontRef>
-        </p:style>
-        <p:txBody>
-          <a:bodyPr rtlCol="0" anchor="ctr"/>
-          <a:lstStyle/>
-          <a:p>
-            <a:pPr algn="ctr"/>
-          </a:p>
-        </p:txBody>
-      </p:sp>
-      <p:sp>
-        <p:nvSpPr>
-          <p:cNvPr id="10" name="TextBox 9"/>
+              <a:t>Integriertes Report-Konzept für eine eigene aktuelle Unsicherheitssituation entwickeln</a:t>
+            </a:r>
+          </a:p>
+        </p:txBody>
+      </p:sp>
+      <p:sp>
+        <p:nvSpPr>
+          <p:cNvPr id="7" name="TextBox 6"/>
           <p:cNvSpPr txBox="1"/>
           <p:nvPr/>
         </p:nvSpPr>
         <p:spPr>
           <a:xfrm>
-            <a:off x="868680" y="5596128"/>
-            <a:ext cx="10451592" cy="457200"/>
-          </a:xfrm>
-          <a:prstGeom prst="rect">
-            <a:avLst/>
-          </a:prstGeom>
-          <a:noFill/>
-        </p:spPr>
-        <p:txBody>
-          <a:bodyPr wrap="square">
-            <a:spAutoFit/>
-          </a:bodyPr>
-          <a:lstStyle/>
-          <a:p>
-            <a:pPr algn="l"/>
-            <a:r>
-              <a:rPr sz="1300" b="1" i="0">
-                <a:solidFill>
-                  <a:srgbClr val="FFFFFF"/>
-                </a:solidFill>
-                <a:latin typeface="Arial"/>
-              </a:rPr>
-              <a:t>→  Bearbeitung im Teilnehmer-Workbook (Arbeitsblatt mit Ausfüllfeldern)</a:t>
-            </a:r>
-          </a:p>
-        </p:txBody>
-      </p:sp>
-      <p:sp>
-        <p:nvSpPr>
-          <p:cNvPr id="11" name="Rectangle 10"/>
-          <p:cNvSpPr/>
-          <p:nvPr/>
-        </p:nvSpPr>
-        <p:spPr>
-          <a:xfrm>
-            <a:off x="0" y="6510528"/>
-            <a:ext cx="12188952" cy="347472"/>
-          </a:xfrm>
-          <a:prstGeom prst="rect">
-            <a:avLst/>
-          </a:prstGeom>
-          <a:solidFill>
-            <a:srgbClr val="0A1937"/>
-          </a:solidFill>
-          <a:ln>
-            <a:noFill/>
-          </a:ln>
-        </p:spPr>
-        <p:style>
-          <a:lnRef idx="1">
-            <a:schemeClr val="accent1"/>
-          </a:lnRef>
-          <a:fillRef idx="3">
-            <a:schemeClr val="accent1"/>
-          </a:fillRef>
-          <a:effectRef idx="2">
-            <a:schemeClr val="accent1"/>
-          </a:effectRef>
-          <a:fontRef idx="minor">
-            <a:schemeClr val="lt1"/>
-          </a:fontRef>
-        </p:style>
-        <p:txBody>
-          <a:bodyPr rtlCol="0" anchor="ctr"/>
-          <a:lstStyle/>
-          <a:p>
-            <a:pPr algn="ctr"/>
-          </a:p>
-        </p:txBody>
-      </p:sp>
-      <p:sp>
-        <p:nvSpPr>
-          <p:cNvPr id="12" name="TextBox 11"/>
-          <p:cNvSpPr txBox="1"/>
-          <p:nvPr/>
-        </p:nvSpPr>
-        <p:spPr>
-          <a:xfrm>
-            <a:off x="685800" y="6583680"/>
-            <a:ext cx="6490411" cy="256032"/>
+            <a:off x="685800" y="6355080"/>
+            <a:ext cx="10817352" cy="274320"/>
           </a:xfrm>
           <a:prstGeom prst="rect">
             <a:avLst/>
@@ -8580,7 +8673,7 @@
             <a:r>
               <a:rPr sz="700">
                 <a:solidFill>
-                  <a:srgbClr val="A0B4D2"/>
+                  <a:srgbClr val="8CA0C3"/>
                 </a:solidFill>
                 <a:latin typeface="Consolas"/>
               </a:rPr>
@@ -9020,6 +9113,49 @@
             <a:avLst/>
           </a:prstGeom>
           <a:solidFill>
+            <a:srgbClr val="EDEDF3"/>
+          </a:solidFill>
+          <a:ln>
+            <a:noFill/>
+          </a:ln>
+        </p:spPr>
+        <p:style>
+          <a:lnRef idx="1">
+            <a:schemeClr val="accent1"/>
+          </a:lnRef>
+          <a:fillRef idx="3">
+            <a:schemeClr val="accent1"/>
+          </a:fillRef>
+          <a:effectRef idx="2">
+            <a:schemeClr val="accent1"/>
+          </a:effectRef>
+          <a:fontRef idx="minor">
+            <a:schemeClr val="lt1"/>
+          </a:fontRef>
+        </p:style>
+        <p:txBody>
+          <a:bodyPr rtlCol="0" anchor="ctr"/>
+          <a:lstStyle/>
+          <a:p>
+            <a:pPr algn="ctr"/>
+          </a:p>
+        </p:txBody>
+      </p:sp>
+      <p:sp>
+        <p:nvSpPr>
+          <p:cNvPr id="3" name="Rectangle 2"/>
+          <p:cNvSpPr/>
+          <p:nvPr/>
+        </p:nvSpPr>
+        <p:spPr>
+          <a:xfrm>
+            <a:off x="0" y="0"/>
+            <a:ext cx="12188952" cy="50292"/>
+          </a:xfrm>
+          <a:prstGeom prst="rect">
+            <a:avLst/>
+          </a:prstGeom>
+          <a:solidFill>
             <a:srgbClr val="1F2C56"/>
           </a:solidFill>
           <a:ln>
@@ -9050,14 +9186,14 @@
       </p:sp>
       <p:sp>
         <p:nvSpPr>
-          <p:cNvPr id="3" name="TextBox 2"/>
+          <p:cNvPr id="4" name="TextBox 3"/>
           <p:cNvSpPr txBox="1"/>
           <p:nvPr/>
         </p:nvSpPr>
         <p:spPr>
           <a:xfrm>
-            <a:off x="685800" y="2377440"/>
-            <a:ext cx="10817352" cy="365760"/>
+            <a:off x="685800" y="109728"/>
+            <a:ext cx="10817352" cy="228600"/>
           </a:xfrm>
           <a:prstGeom prst="rect">
             <a:avLst/>
@@ -9072,27 +9208,70 @@
           <a:p>
             <a:pPr algn="l"/>
             <a:r>
-              <a:rPr sz="1200">
-                <a:solidFill>
-                  <a:srgbClr val="D9C089"/>
+              <a:rPr sz="750">
+                <a:solidFill>
+                  <a:srgbClr val="78808C"/>
                 </a:solidFill>
                 <a:latin typeface="Consolas"/>
               </a:rPr>
-              <a:t>ABSCHLUSS (12:20–12:40)</a:t>
-            </a:r>
-          </a:p>
-        </p:txBody>
-      </p:sp>
-      <p:sp>
-        <p:nvSpPr>
-          <p:cNvPr id="4" name="Rectangle 3"/>
+              <a:t>TL10  ·  ARBEITSBLATT</a:t>
+            </a:r>
+          </a:p>
+        </p:txBody>
+      </p:sp>
+      <p:sp>
+        <p:nvSpPr>
+          <p:cNvPr id="5" name="Rectangle 4"/>
           <p:cNvSpPr/>
           <p:nvPr/>
         </p:nvSpPr>
         <p:spPr>
           <a:xfrm>
-            <a:off x="685800" y="2788920"/>
-            <a:ext cx="548640" cy="38100"/>
+            <a:off x="0" y="1234440"/>
+            <a:ext cx="12188952" cy="12700"/>
+          </a:xfrm>
+          <a:prstGeom prst="rect">
+            <a:avLst/>
+          </a:prstGeom>
+          <a:solidFill>
+            <a:srgbClr val="D8DFE4"/>
+          </a:solidFill>
+          <a:ln>
+            <a:noFill/>
+          </a:ln>
+        </p:spPr>
+        <p:style>
+          <a:lnRef idx="1">
+            <a:schemeClr val="accent1"/>
+          </a:lnRef>
+          <a:fillRef idx="3">
+            <a:schemeClr val="accent1"/>
+          </a:fillRef>
+          <a:effectRef idx="2">
+            <a:schemeClr val="accent1"/>
+          </a:effectRef>
+          <a:fontRef idx="minor">
+            <a:schemeClr val="lt1"/>
+          </a:fontRef>
+        </p:style>
+        <p:txBody>
+          <a:bodyPr rtlCol="0" anchor="ctr"/>
+          <a:lstStyle/>
+          <a:p>
+            <a:pPr algn="ctr"/>
+          </a:p>
+        </p:txBody>
+      </p:sp>
+      <p:sp>
+        <p:nvSpPr>
+          <p:cNvPr id="6" name="Rectangle 5"/>
+          <p:cNvSpPr/>
+          <p:nvPr/>
+        </p:nvSpPr>
+        <p:spPr>
+          <a:xfrm>
+            <a:off x="685800" y="502920"/>
+            <a:ext cx="36576" cy="658368"/>
           </a:xfrm>
           <a:prstGeom prst="rect">
             <a:avLst/>
@@ -9128,14 +9307,14 @@
       </p:sp>
       <p:sp>
         <p:nvSpPr>
-          <p:cNvPr id="5" name="TextBox 4"/>
+          <p:cNvPr id="7" name="TextBox 6"/>
           <p:cNvSpPr txBox="1"/>
           <p:nvPr/>
         </p:nvSpPr>
         <p:spPr>
           <a:xfrm>
-            <a:off x="685800" y="3017520"/>
-            <a:ext cx="10817352" cy="1463040"/>
+            <a:off x="813816" y="502920"/>
+            <a:ext cx="10634472" cy="685800"/>
           </a:xfrm>
           <a:prstGeom prst="rect">
             <a:avLst/>
@@ -9150,27 +9329,27 @@
           <a:p>
             <a:pPr algn="l"/>
             <a:r>
-              <a:rPr sz="4000" b="1" i="0">
-                <a:solidFill>
-                  <a:srgbClr val="FFFFFF"/>
+              <a:rPr sz="2400" b="1" i="0">
+                <a:solidFill>
+                  <a:srgbClr val="1F2C56"/>
                 </a:solidFill>
                 <a:latin typeface="Arial"/>
               </a:rPr>
-              <a:t>Transfer: Drei Aufgaben – und die Frage, die den Track schließt</a:t>
-            </a:r>
-          </a:p>
-        </p:txBody>
-      </p:sp>
-      <p:sp>
-        <p:nvSpPr>
-          <p:cNvPr id="6" name="TextBox 5"/>
+              <a:t>AB-2: Die fünf Bausteine – vollständig, nicht nur als Stichworte</a:t>
+            </a:r>
+          </a:p>
+        </p:txBody>
+      </p:sp>
+      <p:sp>
+        <p:nvSpPr>
+          <p:cNvPr id="8" name="TextBox 7"/>
           <p:cNvSpPr txBox="1"/>
           <p:nvPr/>
         </p:nvSpPr>
         <p:spPr>
           <a:xfrm>
-            <a:off x="685800" y="4480560"/>
-            <a:ext cx="8653881" cy="1280160"/>
+            <a:off x="685800" y="1554480"/>
+            <a:ext cx="10817352" cy="3840480"/>
           </a:xfrm>
           <a:prstGeom prst="rect">
             <a:avLst/>
@@ -9183,29 +9362,233 @@
           </a:bodyPr>
           <a:lstStyle/>
           <a:p>
+            <a:pPr marL="190500" indent="-190500">
+              <a:spcBef>
+                <a:spcPts val="400"/>
+              </a:spcBef>
+              <a:spcAft>
+                <a:spcPts val="200"/>
+              </a:spcAft>
+            </a:pPr>
+            <a:r>
+              <a:rPr sz="1400">
+                <a:solidFill>
+                  <a:srgbClr val="3D5466"/>
+                </a:solidFill>
+                <a:latin typeface="Arial"/>
+              </a:rPr>
+              <a:t>▸  Teil A: Situation – Was ist unklar, für wen, welche Cues?</a:t>
+            </a:r>
+          </a:p>
+          <a:p>
+            <a:pPr marL="190500" indent="-190500">
+              <a:spcBef>
+                <a:spcPts val="400"/>
+              </a:spcBef>
+              <a:spcAft>
+                <a:spcPts val="200"/>
+              </a:spcAft>
+            </a:pPr>
+            <a:r>
+              <a:rPr sz="1400">
+                <a:solidFill>
+                  <a:srgbClr val="3D5466"/>
+                </a:solidFill>
+                <a:latin typeface="Arial"/>
+              </a:rPr>
+              <a:t>▸  Teil B: Herausforderungs-Typ – technisch, adaptiv oder beides?</a:t>
+            </a:r>
+          </a:p>
+          <a:p>
+            <a:pPr marL="190500" indent="-190500">
+              <a:spcBef>
+                <a:spcPts val="400"/>
+              </a:spcBef>
+              <a:spcAft>
+                <a:spcPts val="200"/>
+              </a:spcAft>
+            </a:pPr>
+            <a:r>
+              <a:rPr sz="1400">
+                <a:solidFill>
+                  <a:srgbClr val="3D5466"/>
+                </a:solidFill>
+                <a:latin typeface="Arial"/>
+              </a:rPr>
+              <a:t>▸  Teil C: Sensemaking-Botschaft ans Team – drei Sätze ohne Beschönigung.</a:t>
+            </a:r>
+          </a:p>
+          <a:p>
+            <a:pPr marL="190500" indent="-190500">
+              <a:spcBef>
+                <a:spcPts val="400"/>
+              </a:spcBef>
+              <a:spcAft>
+                <a:spcPts val="200"/>
+              </a:spcAft>
+            </a:pPr>
+            <a:r>
+              <a:rPr sz="1400">
+                <a:solidFill>
+                  <a:srgbClr val="3D5466"/>
+                </a:solidFill>
+                <a:latin typeface="Arial"/>
+              </a:rPr>
+              <a:t>▸  Teil D: Report nach oben – fünf Strukturelemente vollständig ausformuliert.</a:t>
+            </a:r>
+          </a:p>
+          <a:p>
+            <a:pPr marL="190500" indent="-190500">
+              <a:spcBef>
+                <a:spcPts val="400"/>
+              </a:spcBef>
+              <a:spcAft>
+                <a:spcPts val="200"/>
+              </a:spcAft>
+            </a:pPr>
+            <a:r>
+              <a:rPr sz="1400">
+                <a:solidFill>
+                  <a:srgbClr val="3D5466"/>
+                </a:solidFill>
+                <a:latin typeface="Arial"/>
+              </a:rPr>
+              <a:t>▸  Teil E: Doppelte Loyalität – persönliche Standortbestimmung.</a:t>
+            </a:r>
+          </a:p>
+        </p:txBody>
+      </p:sp>
+      <p:sp>
+        <p:nvSpPr>
+          <p:cNvPr id="9" name="Rectangle 8"/>
+          <p:cNvSpPr/>
+          <p:nvPr/>
+        </p:nvSpPr>
+        <p:spPr>
+          <a:xfrm>
+            <a:off x="685800" y="5486400"/>
+            <a:ext cx="10817352" cy="640080"/>
+          </a:xfrm>
+          <a:prstGeom prst="rect">
+            <a:avLst/>
+          </a:prstGeom>
+          <a:solidFill>
+            <a:srgbClr val="1F2C56"/>
+          </a:solidFill>
+          <a:ln>
+            <a:noFill/>
+          </a:ln>
+        </p:spPr>
+        <p:style>
+          <a:lnRef idx="1">
+            <a:schemeClr val="accent1"/>
+          </a:lnRef>
+          <a:fillRef idx="3">
+            <a:schemeClr val="accent1"/>
+          </a:fillRef>
+          <a:effectRef idx="2">
+            <a:schemeClr val="accent1"/>
+          </a:effectRef>
+          <a:fontRef idx="minor">
+            <a:schemeClr val="lt1"/>
+          </a:fontRef>
+        </p:style>
+        <p:txBody>
+          <a:bodyPr rtlCol="0" anchor="ctr"/>
+          <a:lstStyle/>
+          <a:p>
+            <a:pPr algn="ctr"/>
+          </a:p>
+        </p:txBody>
+      </p:sp>
+      <p:sp>
+        <p:nvSpPr>
+          <p:cNvPr id="10" name="TextBox 9"/>
+          <p:cNvSpPr txBox="1"/>
+          <p:nvPr/>
+        </p:nvSpPr>
+        <p:spPr>
+          <a:xfrm>
+            <a:off x="868680" y="5596128"/>
+            <a:ext cx="10451592" cy="457200"/>
+          </a:xfrm>
+          <a:prstGeom prst="rect">
+            <a:avLst/>
+          </a:prstGeom>
+          <a:noFill/>
+        </p:spPr>
+        <p:txBody>
+          <a:bodyPr wrap="square">
+            <a:spAutoFit/>
+          </a:bodyPr>
+          <a:lstStyle/>
+          <a:p>
             <a:pPr algn="l"/>
             <a:r>
-              <a:rPr sz="1600" b="0" i="0">
-                <a:solidFill>
-                  <a:srgbClr val="C8D2E6"/>
+              <a:rPr sz="1300" b="1" i="0">
+                <a:solidFill>
+                  <a:srgbClr val="FFFFFF"/>
                 </a:solidFill>
                 <a:latin typeface="Arial"/>
               </a:rPr>
-              <a:t>Selbstverpflichtung + Abschlussimpuls des gesamten Führungs-Tracks</a:t>
-            </a:r>
-          </a:p>
-        </p:txBody>
-      </p:sp>
-      <p:sp>
-        <p:nvSpPr>
-          <p:cNvPr id="7" name="TextBox 6"/>
+              <a:t>→  Bearbeitung im Teilnehmer-Workbook (Arbeitsblatt mit Ausfüllfeldern)</a:t>
+            </a:r>
+          </a:p>
+        </p:txBody>
+      </p:sp>
+      <p:sp>
+        <p:nvSpPr>
+          <p:cNvPr id="11" name="Rectangle 10"/>
+          <p:cNvSpPr/>
+          <p:nvPr/>
+        </p:nvSpPr>
+        <p:spPr>
+          <a:xfrm>
+            <a:off x="0" y="6510528"/>
+            <a:ext cx="12188952" cy="347472"/>
+          </a:xfrm>
+          <a:prstGeom prst="rect">
+            <a:avLst/>
+          </a:prstGeom>
+          <a:solidFill>
+            <a:srgbClr val="0A1937"/>
+          </a:solidFill>
+          <a:ln>
+            <a:noFill/>
+          </a:ln>
+        </p:spPr>
+        <p:style>
+          <a:lnRef idx="1">
+            <a:schemeClr val="accent1"/>
+          </a:lnRef>
+          <a:fillRef idx="3">
+            <a:schemeClr val="accent1"/>
+          </a:fillRef>
+          <a:effectRef idx="2">
+            <a:schemeClr val="accent1"/>
+          </a:effectRef>
+          <a:fontRef idx="minor">
+            <a:schemeClr val="lt1"/>
+          </a:fontRef>
+        </p:style>
+        <p:txBody>
+          <a:bodyPr rtlCol="0" anchor="ctr"/>
+          <a:lstStyle/>
+          <a:p>
+            <a:pPr algn="ctr"/>
+          </a:p>
+        </p:txBody>
+      </p:sp>
+      <p:sp>
+        <p:nvSpPr>
+          <p:cNvPr id="12" name="TextBox 11"/>
           <p:cNvSpPr txBox="1"/>
           <p:nvPr/>
         </p:nvSpPr>
         <p:spPr>
           <a:xfrm>
-            <a:off x="685800" y="6355080"/>
-            <a:ext cx="10817352" cy="274320"/>
+            <a:off x="685800" y="6583680"/>
+            <a:ext cx="6490411" cy="256032"/>
           </a:xfrm>
           <a:prstGeom prst="rect">
             <a:avLst/>
@@ -9222,7 +9605,7 @@
             <a:r>
               <a:rPr sz="700">
                 <a:solidFill>
-                  <a:srgbClr val="8CA0C3"/>
+                  <a:srgbClr val="A0B4D2"/>
                 </a:solidFill>
                 <a:latin typeface="Consolas"/>
               </a:rPr>
@@ -9264,7 +9647,7 @@
             <a:avLst/>
           </a:prstGeom>
           <a:solidFill>
-            <a:srgbClr val="EDEDF3"/>
+            <a:srgbClr val="1F2C56"/>
           </a:solidFill>
           <a:ln>
             <a:noFill/>
@@ -9294,57 +9677,14 @@
       </p:sp>
       <p:sp>
         <p:nvSpPr>
-          <p:cNvPr id="3" name="Rectangle 2"/>
-          <p:cNvSpPr/>
-          <p:nvPr/>
-        </p:nvSpPr>
-        <p:spPr>
-          <a:xfrm>
-            <a:off x="0" y="0"/>
-            <a:ext cx="12188952" cy="50292"/>
-          </a:xfrm>
-          <a:prstGeom prst="rect">
-            <a:avLst/>
-          </a:prstGeom>
-          <a:solidFill>
-            <a:srgbClr val="1F2C56"/>
-          </a:solidFill>
-          <a:ln>
-            <a:noFill/>
-          </a:ln>
-        </p:spPr>
-        <p:style>
-          <a:lnRef idx="1">
-            <a:schemeClr val="accent1"/>
-          </a:lnRef>
-          <a:fillRef idx="3">
-            <a:schemeClr val="accent1"/>
-          </a:fillRef>
-          <a:effectRef idx="2">
-            <a:schemeClr val="accent1"/>
-          </a:effectRef>
-          <a:fontRef idx="minor">
-            <a:schemeClr val="lt1"/>
-          </a:fontRef>
-        </p:style>
-        <p:txBody>
-          <a:bodyPr rtlCol="0" anchor="ctr"/>
-          <a:lstStyle/>
-          <a:p>
-            <a:pPr algn="ctr"/>
-          </a:p>
-        </p:txBody>
-      </p:sp>
-      <p:sp>
-        <p:nvSpPr>
-          <p:cNvPr id="4" name="TextBox 3"/>
+          <p:cNvPr id="3" name="TextBox 2"/>
           <p:cNvSpPr txBox="1"/>
           <p:nvPr/>
         </p:nvSpPr>
         <p:spPr>
           <a:xfrm>
-            <a:off x="685800" y="109728"/>
-            <a:ext cx="10817352" cy="228600"/>
+            <a:off x="685800" y="2377440"/>
+            <a:ext cx="10817352" cy="365760"/>
           </a:xfrm>
           <a:prstGeom prst="rect">
             <a:avLst/>
@@ -9359,70 +9699,27 @@
           <a:p>
             <a:pPr algn="l"/>
             <a:r>
-              <a:rPr sz="750">
-                <a:solidFill>
-                  <a:srgbClr val="78808C"/>
+              <a:rPr sz="1200">
+                <a:solidFill>
+                  <a:srgbClr val="D9C089"/>
                 </a:solidFill>
                 <a:latin typeface="Consolas"/>
               </a:rPr>
-              <a:t>TL10  ·  INHALT</a:t>
-            </a:r>
-          </a:p>
-        </p:txBody>
-      </p:sp>
-      <p:sp>
-        <p:nvSpPr>
-          <p:cNvPr id="5" name="Rectangle 4"/>
+              <a:t>ABSCHLUSS (12:20–12:40)</a:t>
+            </a:r>
+          </a:p>
+        </p:txBody>
+      </p:sp>
+      <p:sp>
+        <p:nvSpPr>
+          <p:cNvPr id="4" name="Rectangle 3"/>
           <p:cNvSpPr/>
           <p:nvPr/>
         </p:nvSpPr>
         <p:spPr>
           <a:xfrm>
-            <a:off x="0" y="1234440"/>
-            <a:ext cx="12188952" cy="12700"/>
-          </a:xfrm>
-          <a:prstGeom prst="rect">
-            <a:avLst/>
-          </a:prstGeom>
-          <a:solidFill>
-            <a:srgbClr val="D8DFE4"/>
-          </a:solidFill>
-          <a:ln>
-            <a:noFill/>
-          </a:ln>
-        </p:spPr>
-        <p:style>
-          <a:lnRef idx="1">
-            <a:schemeClr val="accent1"/>
-          </a:lnRef>
-          <a:fillRef idx="3">
-            <a:schemeClr val="accent1"/>
-          </a:fillRef>
-          <a:effectRef idx="2">
-            <a:schemeClr val="accent1"/>
-          </a:effectRef>
-          <a:fontRef idx="minor">
-            <a:schemeClr val="lt1"/>
-          </a:fontRef>
-        </p:style>
-        <p:txBody>
-          <a:bodyPr rtlCol="0" anchor="ctr"/>
-          <a:lstStyle/>
-          <a:p>
-            <a:pPr algn="ctr"/>
-          </a:p>
-        </p:txBody>
-      </p:sp>
-      <p:sp>
-        <p:nvSpPr>
-          <p:cNvPr id="6" name="Rectangle 5"/>
-          <p:cNvSpPr/>
-          <p:nvPr/>
-        </p:nvSpPr>
-        <p:spPr>
-          <a:xfrm>
-            <a:off x="685800" y="502920"/>
-            <a:ext cx="36576" cy="658368"/>
+            <a:off x="685800" y="2788920"/>
+            <a:ext cx="548640" cy="38100"/>
           </a:xfrm>
           <a:prstGeom prst="rect">
             <a:avLst/>
@@ -9458,14 +9755,14 @@
       </p:sp>
       <p:sp>
         <p:nvSpPr>
-          <p:cNvPr id="7" name="TextBox 6"/>
+          <p:cNvPr id="5" name="TextBox 4"/>
           <p:cNvSpPr txBox="1"/>
           <p:nvPr/>
         </p:nvSpPr>
         <p:spPr>
           <a:xfrm>
-            <a:off x="813816" y="502920"/>
-            <a:ext cx="10634472" cy="685800"/>
+            <a:off x="685800" y="3017520"/>
+            <a:ext cx="10817352" cy="1463040"/>
           </a:xfrm>
           <a:prstGeom prst="rect">
             <a:avLst/>
@@ -9480,27 +9777,27 @@
           <a:p>
             <a:pPr algn="l"/>
             <a:r>
-              <a:rPr sz="2400" b="1" i="0">
-                <a:solidFill>
-                  <a:srgbClr val="1F2C56"/>
+              <a:rPr sz="4000" b="1" i="0">
+                <a:solidFill>
+                  <a:srgbClr val="FFFFFF"/>
                 </a:solidFill>
                 <a:latin typeface="Arial"/>
               </a:rPr>
-              <a:t>Drei Transferaufgaben für die nächsten vier Wochen</a:t>
-            </a:r>
-          </a:p>
-        </p:txBody>
-      </p:sp>
-      <p:sp>
-        <p:nvSpPr>
-          <p:cNvPr id="8" name="TextBox 7"/>
+              <a:t>Transfer: Drei Aufgaben – und die Frage, die den Track schließt</a:t>
+            </a:r>
+          </a:p>
+        </p:txBody>
+      </p:sp>
+      <p:sp>
+        <p:nvSpPr>
+          <p:cNvPr id="6" name="TextBox 5"/>
           <p:cNvSpPr txBox="1"/>
           <p:nvPr/>
         </p:nvSpPr>
         <p:spPr>
           <a:xfrm>
-            <a:off x="685800" y="1417320"/>
-            <a:ext cx="10817352" cy="4892040"/>
+            <a:off x="685800" y="4480560"/>
+            <a:ext cx="8653881" cy="1280160"/>
           </a:xfrm>
           <a:prstGeom prst="rect">
             <a:avLst/>
@@ -9508,141 +9805,34 @@
           <a:noFill/>
         </p:spPr>
         <p:txBody>
-          <a:bodyPr wrap="square" anchor="ctr">
+          <a:bodyPr wrap="square">
             <a:spAutoFit/>
           </a:bodyPr>
           <a:lstStyle/>
           <a:p>
-            <a:pPr marL="190500" indent="-190500">
-              <a:spcBef>
-                <a:spcPts val="400"/>
-              </a:spcBef>
-              <a:spcAft>
-                <a:spcPts val="200"/>
-              </a:spcAft>
-            </a:pPr>
-            <a:r>
-              <a:rPr sz="1300">
-                <a:solidFill>
-                  <a:srgbClr val="3D5466"/>
+            <a:pPr algn="l"/>
+            <a:r>
+              <a:rPr sz="1600" b="0" i="0">
+                <a:solidFill>
+                  <a:srgbClr val="C8D2E6"/>
                 </a:solidFill>
                 <a:latin typeface="Arial"/>
               </a:rPr>
-              <a:t>▸  1: Unsicherheits-Diagnose – eine aktuelle Situation mit Heifetz und Weick analysieren.</a:t>
-            </a:r>
-          </a:p>
-          <a:p>
-            <a:pPr marL="190500" indent="-190500">
-              <a:spcBef>
-                <a:spcPts val="400"/>
-              </a:spcBef>
-              <a:spcAft>
-                <a:spcPts val="200"/>
-              </a:spcAft>
-            </a:pPr>
-            <a:r>
-              <a:rPr sz="1300">
-                <a:solidFill>
-                  <a:srgbClr val="3D5466"/>
-                </a:solidFill>
-                <a:latin typeface="Arial"/>
-              </a:rPr>
-              <a:t>▸  2: Report nach oben schreiben – vollständig, mit allen fünf Elementen, absenden.</a:t>
-            </a:r>
-          </a:p>
-          <a:p>
-            <a:pPr marL="190500" indent="-190500">
-              <a:spcBef>
-                <a:spcPts val="400"/>
-              </a:spcBef>
-              <a:spcAft>
-                <a:spcPts val="200"/>
-              </a:spcAft>
-            </a:pPr>
-            <a:r>
-              <a:rPr sz="1300">
-                <a:solidFill>
-                  <a:srgbClr val="3D5466"/>
-                </a:solidFill>
-                <a:latin typeface="Arial"/>
-              </a:rPr>
-              <a:t>▸  3: Doppelte Loyalität aktiv gestalten – nach oben eintreten, nach unten klar sein.</a:t>
-            </a:r>
-          </a:p>
-          <a:p>
-            <a:pPr marL="190500" indent="-190500">
-              <a:spcBef>
-                <a:spcPts val="400"/>
-              </a:spcBef>
-              <a:spcAft>
-                <a:spcPts val="200"/>
-              </a:spcAft>
-            </a:pPr>
-            <a:r>
-              <a:rPr sz="1300">
-                <a:solidFill>
-                  <a:srgbClr val="3D5466"/>
-                </a:solidFill>
-                <a:latin typeface="Arial"/>
-              </a:rPr>
-              <a:t>▸  Ergebnisse in die nächste Teamleiter-Runde bringen – verbindlich (Termin jetzt eintragen).</a:t>
-            </a:r>
-          </a:p>
-        </p:txBody>
-      </p:sp>
-      <p:sp>
-        <p:nvSpPr>
-          <p:cNvPr id="9" name="Rectangle 8"/>
-          <p:cNvSpPr/>
-          <p:nvPr/>
-        </p:nvSpPr>
-        <p:spPr>
-          <a:xfrm>
-            <a:off x="0" y="6510528"/>
-            <a:ext cx="12188952" cy="347472"/>
-          </a:xfrm>
-          <a:prstGeom prst="rect">
-            <a:avLst/>
-          </a:prstGeom>
-          <a:solidFill>
-            <a:srgbClr val="0A1937"/>
-          </a:solidFill>
-          <a:ln>
-            <a:noFill/>
-          </a:ln>
-        </p:spPr>
-        <p:style>
-          <a:lnRef idx="1">
-            <a:schemeClr val="accent1"/>
-          </a:lnRef>
-          <a:fillRef idx="3">
-            <a:schemeClr val="accent1"/>
-          </a:fillRef>
-          <a:effectRef idx="2">
-            <a:schemeClr val="accent1"/>
-          </a:effectRef>
-          <a:fontRef idx="minor">
-            <a:schemeClr val="lt1"/>
-          </a:fontRef>
-        </p:style>
-        <p:txBody>
-          <a:bodyPr rtlCol="0" anchor="ctr"/>
-          <a:lstStyle/>
-          <a:p>
-            <a:pPr algn="ctr"/>
-          </a:p>
-        </p:txBody>
-      </p:sp>
-      <p:sp>
-        <p:nvSpPr>
-          <p:cNvPr id="10" name="TextBox 9"/>
+              <a:t>Selbstverpflichtung + Abschlussimpuls des gesamten Führungs-Tracks</a:t>
+            </a:r>
+          </a:p>
+        </p:txBody>
+      </p:sp>
+      <p:sp>
+        <p:nvSpPr>
+          <p:cNvPr id="7" name="TextBox 6"/>
           <p:cNvSpPr txBox="1"/>
           <p:nvPr/>
         </p:nvSpPr>
         <p:spPr>
           <a:xfrm>
-            <a:off x="685800" y="6583680"/>
-            <a:ext cx="6490411" cy="256032"/>
+            <a:off x="685800" y="6355080"/>
+            <a:ext cx="10817352" cy="274320"/>
           </a:xfrm>
           <a:prstGeom prst="rect">
             <a:avLst/>
@@ -9659,7 +9849,7 @@
             <a:r>
               <a:rPr sz="700">
                 <a:solidFill>
-                  <a:srgbClr val="A0B4D2"/>
+                  <a:srgbClr val="8CA0C3"/>
                 </a:solidFill>
                 <a:latin typeface="Consolas"/>
               </a:rPr>
@@ -9677,6 +9867,443 @@
 </file>
 
 <file path=ppt/slides/slide22.xml><?xml version="1.0" encoding="utf-8"?>
+<p:sld xmlns:a="http://schemas.openxmlformats.org/drawingml/2006/main" xmlns:p="http://schemas.openxmlformats.org/presentationml/2006/main" xmlns:r="http://schemas.openxmlformats.org/officeDocument/2006/relationships">
+  <p:cSld>
+    <p:spTree>
+      <p:nvGrpSpPr>
+        <p:cNvPr id="1" name=""/>
+        <p:cNvGrpSpPr/>
+        <p:nvPr/>
+      </p:nvGrpSpPr>
+      <p:grpSpPr/>
+      <p:sp>
+        <p:nvSpPr>
+          <p:cNvPr id="2" name="Rectangle 1"/>
+          <p:cNvSpPr/>
+          <p:nvPr/>
+        </p:nvSpPr>
+        <p:spPr>
+          <a:xfrm>
+            <a:off x="0" y="0"/>
+            <a:ext cx="12188952" cy="6858000"/>
+          </a:xfrm>
+          <a:prstGeom prst="rect">
+            <a:avLst/>
+          </a:prstGeom>
+          <a:solidFill>
+            <a:srgbClr val="EDEDF3"/>
+          </a:solidFill>
+          <a:ln>
+            <a:noFill/>
+          </a:ln>
+        </p:spPr>
+        <p:style>
+          <a:lnRef idx="1">
+            <a:schemeClr val="accent1"/>
+          </a:lnRef>
+          <a:fillRef idx="3">
+            <a:schemeClr val="accent1"/>
+          </a:fillRef>
+          <a:effectRef idx="2">
+            <a:schemeClr val="accent1"/>
+          </a:effectRef>
+          <a:fontRef idx="minor">
+            <a:schemeClr val="lt1"/>
+          </a:fontRef>
+        </p:style>
+        <p:txBody>
+          <a:bodyPr rtlCol="0" anchor="ctr"/>
+          <a:lstStyle/>
+          <a:p>
+            <a:pPr algn="ctr"/>
+          </a:p>
+        </p:txBody>
+      </p:sp>
+      <p:sp>
+        <p:nvSpPr>
+          <p:cNvPr id="3" name="Rectangle 2"/>
+          <p:cNvSpPr/>
+          <p:nvPr/>
+        </p:nvSpPr>
+        <p:spPr>
+          <a:xfrm>
+            <a:off x="0" y="0"/>
+            <a:ext cx="12188952" cy="50292"/>
+          </a:xfrm>
+          <a:prstGeom prst="rect">
+            <a:avLst/>
+          </a:prstGeom>
+          <a:solidFill>
+            <a:srgbClr val="1F2C56"/>
+          </a:solidFill>
+          <a:ln>
+            <a:noFill/>
+          </a:ln>
+        </p:spPr>
+        <p:style>
+          <a:lnRef idx="1">
+            <a:schemeClr val="accent1"/>
+          </a:lnRef>
+          <a:fillRef idx="3">
+            <a:schemeClr val="accent1"/>
+          </a:fillRef>
+          <a:effectRef idx="2">
+            <a:schemeClr val="accent1"/>
+          </a:effectRef>
+          <a:fontRef idx="minor">
+            <a:schemeClr val="lt1"/>
+          </a:fontRef>
+        </p:style>
+        <p:txBody>
+          <a:bodyPr rtlCol="0" anchor="ctr"/>
+          <a:lstStyle/>
+          <a:p>
+            <a:pPr algn="ctr"/>
+          </a:p>
+        </p:txBody>
+      </p:sp>
+      <p:sp>
+        <p:nvSpPr>
+          <p:cNvPr id="4" name="TextBox 3"/>
+          <p:cNvSpPr txBox="1"/>
+          <p:nvPr/>
+        </p:nvSpPr>
+        <p:spPr>
+          <a:xfrm>
+            <a:off x="685800" y="109728"/>
+            <a:ext cx="10817352" cy="228600"/>
+          </a:xfrm>
+          <a:prstGeom prst="rect">
+            <a:avLst/>
+          </a:prstGeom>
+          <a:noFill/>
+        </p:spPr>
+        <p:txBody>
+          <a:bodyPr wrap="none">
+            <a:spAutoFit/>
+          </a:bodyPr>
+          <a:lstStyle/>
+          <a:p>
+            <a:pPr algn="l"/>
+            <a:r>
+              <a:rPr sz="750">
+                <a:solidFill>
+                  <a:srgbClr val="78808C"/>
+                </a:solidFill>
+                <a:latin typeface="Consolas"/>
+              </a:rPr>
+              <a:t>TL10  ·  INHALT</a:t>
+            </a:r>
+          </a:p>
+        </p:txBody>
+      </p:sp>
+      <p:sp>
+        <p:nvSpPr>
+          <p:cNvPr id="5" name="Rectangle 4"/>
+          <p:cNvSpPr/>
+          <p:nvPr/>
+        </p:nvSpPr>
+        <p:spPr>
+          <a:xfrm>
+            <a:off x="0" y="1234440"/>
+            <a:ext cx="12188952" cy="12700"/>
+          </a:xfrm>
+          <a:prstGeom prst="rect">
+            <a:avLst/>
+          </a:prstGeom>
+          <a:solidFill>
+            <a:srgbClr val="D8DFE4"/>
+          </a:solidFill>
+          <a:ln>
+            <a:noFill/>
+          </a:ln>
+        </p:spPr>
+        <p:style>
+          <a:lnRef idx="1">
+            <a:schemeClr val="accent1"/>
+          </a:lnRef>
+          <a:fillRef idx="3">
+            <a:schemeClr val="accent1"/>
+          </a:fillRef>
+          <a:effectRef idx="2">
+            <a:schemeClr val="accent1"/>
+          </a:effectRef>
+          <a:fontRef idx="minor">
+            <a:schemeClr val="lt1"/>
+          </a:fontRef>
+        </p:style>
+        <p:txBody>
+          <a:bodyPr rtlCol="0" anchor="ctr"/>
+          <a:lstStyle/>
+          <a:p>
+            <a:pPr algn="ctr"/>
+          </a:p>
+        </p:txBody>
+      </p:sp>
+      <p:sp>
+        <p:nvSpPr>
+          <p:cNvPr id="6" name="Rectangle 5"/>
+          <p:cNvSpPr/>
+          <p:nvPr/>
+        </p:nvSpPr>
+        <p:spPr>
+          <a:xfrm>
+            <a:off x="685800" y="502920"/>
+            <a:ext cx="36576" cy="658368"/>
+          </a:xfrm>
+          <a:prstGeom prst="rect">
+            <a:avLst/>
+          </a:prstGeom>
+          <a:solidFill>
+            <a:srgbClr val="D9C089"/>
+          </a:solidFill>
+          <a:ln>
+            <a:noFill/>
+          </a:ln>
+        </p:spPr>
+        <p:style>
+          <a:lnRef idx="1">
+            <a:schemeClr val="accent1"/>
+          </a:lnRef>
+          <a:fillRef idx="3">
+            <a:schemeClr val="accent1"/>
+          </a:fillRef>
+          <a:effectRef idx="2">
+            <a:schemeClr val="accent1"/>
+          </a:effectRef>
+          <a:fontRef idx="minor">
+            <a:schemeClr val="lt1"/>
+          </a:fontRef>
+        </p:style>
+        <p:txBody>
+          <a:bodyPr rtlCol="0" anchor="ctr"/>
+          <a:lstStyle/>
+          <a:p>
+            <a:pPr algn="ctr"/>
+          </a:p>
+        </p:txBody>
+      </p:sp>
+      <p:sp>
+        <p:nvSpPr>
+          <p:cNvPr id="7" name="TextBox 6"/>
+          <p:cNvSpPr txBox="1"/>
+          <p:nvPr/>
+        </p:nvSpPr>
+        <p:spPr>
+          <a:xfrm>
+            <a:off x="813816" y="502920"/>
+            <a:ext cx="10634472" cy="685800"/>
+          </a:xfrm>
+          <a:prstGeom prst="rect">
+            <a:avLst/>
+          </a:prstGeom>
+          <a:noFill/>
+        </p:spPr>
+        <p:txBody>
+          <a:bodyPr wrap="square">
+            <a:spAutoFit/>
+          </a:bodyPr>
+          <a:lstStyle/>
+          <a:p>
+            <a:pPr algn="l"/>
+            <a:r>
+              <a:rPr sz="2400" b="1" i="0">
+                <a:solidFill>
+                  <a:srgbClr val="1F2C56"/>
+                </a:solidFill>
+                <a:latin typeface="Arial"/>
+              </a:rPr>
+              <a:t>Drei Transferaufgaben für die nächsten vier Wochen</a:t>
+            </a:r>
+          </a:p>
+        </p:txBody>
+      </p:sp>
+      <p:sp>
+        <p:nvSpPr>
+          <p:cNvPr id="8" name="TextBox 7"/>
+          <p:cNvSpPr txBox="1"/>
+          <p:nvPr/>
+        </p:nvSpPr>
+        <p:spPr>
+          <a:xfrm>
+            <a:off x="685800" y="1417320"/>
+            <a:ext cx="10817352" cy="4892040"/>
+          </a:xfrm>
+          <a:prstGeom prst="rect">
+            <a:avLst/>
+          </a:prstGeom>
+          <a:noFill/>
+        </p:spPr>
+        <p:txBody>
+          <a:bodyPr wrap="square" anchor="ctr">
+            <a:spAutoFit/>
+          </a:bodyPr>
+          <a:lstStyle/>
+          <a:p>
+            <a:pPr marL="190500" indent="-190500">
+              <a:spcBef>
+                <a:spcPts val="400"/>
+              </a:spcBef>
+              <a:spcAft>
+                <a:spcPts val="200"/>
+              </a:spcAft>
+            </a:pPr>
+            <a:r>
+              <a:rPr sz="1300">
+                <a:solidFill>
+                  <a:srgbClr val="3D5466"/>
+                </a:solidFill>
+                <a:latin typeface="Arial"/>
+              </a:rPr>
+              <a:t>▸  1: Unsicherheits-Diagnose – eine aktuelle Situation mit Heifetz und Weick analysieren.</a:t>
+            </a:r>
+          </a:p>
+          <a:p>
+            <a:pPr marL="190500" indent="-190500">
+              <a:spcBef>
+                <a:spcPts val="400"/>
+              </a:spcBef>
+              <a:spcAft>
+                <a:spcPts val="200"/>
+              </a:spcAft>
+            </a:pPr>
+            <a:r>
+              <a:rPr sz="1300">
+                <a:solidFill>
+                  <a:srgbClr val="3D5466"/>
+                </a:solidFill>
+                <a:latin typeface="Arial"/>
+              </a:rPr>
+              <a:t>▸  2: Report nach oben schreiben – vollständig, mit allen fünf Elementen, absenden.</a:t>
+            </a:r>
+          </a:p>
+          <a:p>
+            <a:pPr marL="190500" indent="-190500">
+              <a:spcBef>
+                <a:spcPts val="400"/>
+              </a:spcBef>
+              <a:spcAft>
+                <a:spcPts val="200"/>
+              </a:spcAft>
+            </a:pPr>
+            <a:r>
+              <a:rPr sz="1300">
+                <a:solidFill>
+                  <a:srgbClr val="3D5466"/>
+                </a:solidFill>
+                <a:latin typeface="Arial"/>
+              </a:rPr>
+              <a:t>▸  3: Doppelte Loyalität aktiv gestalten – nach oben eintreten, nach unten klar sein.</a:t>
+            </a:r>
+          </a:p>
+          <a:p>
+            <a:pPr marL="190500" indent="-190500">
+              <a:spcBef>
+                <a:spcPts val="400"/>
+              </a:spcBef>
+              <a:spcAft>
+                <a:spcPts val="200"/>
+              </a:spcAft>
+            </a:pPr>
+            <a:r>
+              <a:rPr sz="1300">
+                <a:solidFill>
+                  <a:srgbClr val="3D5466"/>
+                </a:solidFill>
+                <a:latin typeface="Arial"/>
+              </a:rPr>
+              <a:t>▸  Ergebnisse in die nächste Teamleiter-Runde bringen – verbindlich (Termin jetzt eintragen).</a:t>
+            </a:r>
+          </a:p>
+        </p:txBody>
+      </p:sp>
+      <p:sp>
+        <p:nvSpPr>
+          <p:cNvPr id="9" name="Rectangle 8"/>
+          <p:cNvSpPr/>
+          <p:nvPr/>
+        </p:nvSpPr>
+        <p:spPr>
+          <a:xfrm>
+            <a:off x="0" y="6510528"/>
+            <a:ext cx="12188952" cy="347472"/>
+          </a:xfrm>
+          <a:prstGeom prst="rect">
+            <a:avLst/>
+          </a:prstGeom>
+          <a:solidFill>
+            <a:srgbClr val="0A1937"/>
+          </a:solidFill>
+          <a:ln>
+            <a:noFill/>
+          </a:ln>
+        </p:spPr>
+        <p:style>
+          <a:lnRef idx="1">
+            <a:schemeClr val="accent1"/>
+          </a:lnRef>
+          <a:fillRef idx="3">
+            <a:schemeClr val="accent1"/>
+          </a:fillRef>
+          <a:effectRef idx="2">
+            <a:schemeClr val="accent1"/>
+          </a:effectRef>
+          <a:fontRef idx="minor">
+            <a:schemeClr val="lt1"/>
+          </a:fontRef>
+        </p:style>
+        <p:txBody>
+          <a:bodyPr rtlCol="0" anchor="ctr"/>
+          <a:lstStyle/>
+          <a:p>
+            <a:pPr algn="ctr"/>
+          </a:p>
+        </p:txBody>
+      </p:sp>
+      <p:sp>
+        <p:nvSpPr>
+          <p:cNvPr id="10" name="TextBox 9"/>
+          <p:cNvSpPr txBox="1"/>
+          <p:nvPr/>
+        </p:nvSpPr>
+        <p:spPr>
+          <a:xfrm>
+            <a:off x="685800" y="6583680"/>
+            <a:ext cx="6490411" cy="256032"/>
+          </a:xfrm>
+          <a:prstGeom prst="rect">
+            <a:avLst/>
+          </a:prstGeom>
+          <a:noFill/>
+        </p:spPr>
+        <p:txBody>
+          <a:bodyPr wrap="none">
+            <a:spAutoFit/>
+          </a:bodyPr>
+          <a:lstStyle/>
+          <a:p>
+            <a:pPr algn="l"/>
+            <a:r>
+              <a:rPr sz="700">
+                <a:solidFill>
+                  <a:srgbClr val="A0B4D2"/>
+                </a:solidFill>
+                <a:latin typeface="Consolas"/>
+              </a:rPr>
+              <a:t>FKB Campus  ·  TL10</a:t>
+            </a:r>
+          </a:p>
+        </p:txBody>
+      </p:sp>
+    </p:spTree>
+  </p:cSld>
+  <p:clrMapOvr>
+    <a:masterClrMapping/>
+  </p:clrMapOvr>
+</p:sld>
+</file>
+
+<file path=ppt/slides/slide23.xml><?xml version="1.0" encoding="utf-8"?>
 <p:sld xmlns:a="http://schemas.openxmlformats.org/drawingml/2006/main" xmlns:p="http://schemas.openxmlformats.org/presentationml/2006/main" xmlns:r="http://schemas.openxmlformats.org/officeDocument/2006/relationships">
   <p:cSld>
     <p:spTree>
